--- a/Unit decks/Unit 12 - Sustaining Performance.pptx
+++ b/Unit decks/Unit 12 - Sustaining Performance.pptx
@@ -626,6 +626,34 @@
             </a:r>
             <a:endParaRPr lang="en-US" dirty="0"/>
           </a:p>
+          <a:p/>
+          <a:p>
+            <a:r>
+              <a:t>Professional insights:</a:t>
+            </a:r>
+          </a:p>
+          <a:p/>
+          <a:p>
+            <a:r>
+              <a:t>Success Inertia: The most dangerous period for an organisation is a prolonged season of success, because that is when preparation for resilience is deprioritised.</a:t>
+            </a:r>
+          </a:p>
+          <a:p>
+            <a:r>
+              <a:t>Source: Journal, 24 January 2026 — Professional Insights: Strategy</a:t>
+            </a:r>
+          </a:p>
+          <a:p/>
+          <a:p>
+            <a:r>
+              <a:t>After a near-miss: When a crisis eases, the common response is relief with no reform. After every close call, ask: what condition produced this, and have we changed it?</a:t>
+            </a:r>
+          </a:p>
+          <a:p>
+            <a:r>
+              <a:t>Source: Journal, 30 June 2026 — Professional Insights: Strategy</a:t>
+            </a:r>
+          </a:p>
         </p:txBody>
       </p:sp>
       <p:sp>
@@ -1039,6 +1067,34 @@
             </a:r>
             <a:endParaRPr lang="en-US" dirty="0"/>
           </a:p>
+          <a:p/>
+          <a:p>
+            <a:r>
+              <a:t>Professional insights:</a:t>
+            </a:r>
+          </a:p>
+          <a:p/>
+          <a:p>
+            <a:r>
+              <a:t>Inherited assumptions: Leaders become blockers of growth when they treat inherited assumptions as permanent truth. Recognise when evidence or context is challenging an old boundary. Use this with Step 3 of the navigation chain.</a:t>
+            </a:r>
+          </a:p>
+          <a:p>
+            <a:r>
+              <a:t>Source: Journal, 26 July 2026 — Professional Insights: Leadership</a:t>
+            </a:r>
+          </a:p>
+          <a:p/>
+          <a:p>
+            <a:r>
+              <a:t>V · Is the edge still holding?: Strong cash positions, market share, brands or technology can come to be treated as guarantees of future relevance. Ask: what are we assuming these assets will continue to do for us?</a:t>
+            </a:r>
+          </a:p>
+          <a:p>
+            <a:r>
+              <a:t>Source: Journal, 30 September 2026 — Professional Insights: Strategy</a:t>
+            </a:r>
+          </a:p>
         </p:txBody>
       </p:sp>
       <p:sp>
@@ -1150,6 +1206,23 @@
 Guidance (Section 3): Walk through the chain once as a group using a real example from the room before the Application exercise.</a:t>
             </a:r>
             <a:endParaRPr lang="en-US" dirty="0"/>
+          </a:p>
+          <a:p/>
+          <a:p>
+            <a:r>
+              <a:t>Professional insights:</a:t>
+            </a:r>
+          </a:p>
+          <a:p/>
+          <a:p>
+            <a:r>
+              <a:t>Fixed and adaptable: Sound strategy identifies what must remain fixed (purpose, values and direction) while allowing responses to circumstances to adapt. Uncertainty should not automatically produce frantic activity.</a:t>
+            </a:r>
+          </a:p>
+          <a:p>
+            <a:r>
+              <a:t>Source: Journal, 20 September 2026 — Professional Insights: Strategy</a:t>
+            </a:r>
           </a:p>
         </p:txBody>
       </p:sp>
@@ -1367,6 +1440,34 @@
 Guidance (Section 4): The quarterly commitment is the output of this section. Before leaving the Integration section, the group should name a date, a lead for each of the four conversations, and a format for capturing and acting on the output. If no date is named, the Review will not happen.</a:t>
             </a:r>
             <a:endParaRPr lang="en-US" dirty="0"/>
+          </a:p>
+          <a:p/>
+          <a:p>
+            <a:r>
+              <a:t>Professional insights:</a:t>
+            </a:r>
+          </a:p>
+          <a:p/>
+          <a:p>
+            <a:r>
+              <a:t>Systems behind decisions: The wisest strategic insight is only as durable as the system built to sustain it. Find one good decision with no system behind it to hold the outcome, and build the system.</a:t>
+            </a:r>
+          </a:p>
+          <a:p>
+            <a:r>
+              <a:t>Source: Journal, 7 June 2026 — Professional Insights: Strategy</a:t>
+            </a:r>
+          </a:p>
+          <a:p/>
+          <a:p>
+            <a:r>
+              <a:t>After the pressure eases: A culture’s true posture shows in what people do once the threat has lifted. Name one disciplined practice from the last hard season and decide whether it is still honoured.</a:t>
+            </a:r>
+          </a:p>
+          <a:p>
+            <a:r>
+              <a:t>Source: Journal, 7 May 2026 — Professional Insights: Culture</a:t>
+            </a:r>
           </a:p>
         </p:txBody>
       </p:sp>
@@ -1723,6 +1824,34 @@
             </a:r>
             <a:endParaRPr lang="en-US" dirty="0"/>
           </a:p>
+          <a:p/>
+          <a:p>
+            <a:r>
+              <a:t>Professional insights:</a:t>
+            </a:r>
+          </a:p>
+          <a:p/>
+          <a:p>
+            <a:r>
+              <a:t>First principles under pressure: Pressure tempts leaders to confuse urgent relief with sound direction. Difficult conditions should drive a return to first principles.</a:t>
+            </a:r>
+          </a:p>
+          <a:p>
+            <a:r>
+              <a:t>Source: Journal, 23 July 2026 — Professional Insights: Strategy</a:t>
+            </a:r>
+          </a:p>
+          <a:p/>
+          <a:p>
+            <a:r>
+              <a:t>Drift by accommodation: A venture can drift, one reasonable accommodation at a time, into a commitment that runs against its own purpose. Trace the largest current commitment back through the decisions that led to it and confirm the destination still matches the intent.</a:t>
+            </a:r>
+          </a:p>
+          <a:p>
+            <a:r>
+              <a:t>Source: Journal, 20 May 2026 — Professional Insights: Strategy</a:t>
+            </a:r>
+          </a:p>
         </p:txBody>
       </p:sp>
       <p:sp>
@@ -1921,6 +2050,23 @@
             </a:r>
             <a:endParaRPr lang="en-US" dirty="0"/>
           </a:p>
+          <a:p/>
+          <a:p>
+            <a:r>
+              <a:t>Professional insights:</a:t>
+            </a:r>
+          </a:p>
+          <a:p/>
+          <a:p>
+            <a:r>
+              <a:t>Outliving the architects: Sustainable strategies are designed to outlive their architects. Structure should support purpose, and continuity should be planned before transition becomes necessary.</a:t>
+            </a:r>
+          </a:p>
+          <a:p>
+            <a:r>
+              <a:t>Source: Journal, 9 July 2026 — Professional Insights: Strategy</a:t>
+            </a:r>
+          </a:p>
         </p:txBody>
       </p:sp>
       <p:sp>
@@ -2124,6 +2270,34 @@
             </a:r>
             <a:endParaRPr lang="en-US" dirty="0"/>
           </a:p>
+          <a:p/>
+          <a:p>
+            <a:r>
+              <a:t>Professional insights:</a:t>
+            </a:r>
+          </a:p>
+          <a:p/>
+          <a:p>
+            <a:r>
+              <a:t>Completion and capability: Implementation is incomplete until the gains can be sustained. Distinguish project completion from sustained capability, and protect results through ownership, resourcing, monitoring and corrective action, because they regress when maintenance weakens.</a:t>
+            </a:r>
+          </a:p>
+          <a:p>
+            <a:r>
+              <a:t>Source: Journal, 11 August 2026 — Professional Insights: Strategy</a:t>
+            </a:r>
+          </a:p>
+          <a:p/>
+          <a:p>
+            <a:r>
+              <a:t>Cumulative decline: Organisations rarely fail through a single catastrophic decision. Decline is cumulative: neglected principles, ignored warnings and normalised unhealthy behaviour gradually weaken the systems designed to sustain success.</a:t>
+            </a:r>
+          </a:p>
+          <a:p>
+            <a:r>
+              <a:t>Source: Journal, 27 July 2026 — Professional Insights: Strategy</a:t>
+            </a:r>
+          </a:p>
         </p:txBody>
       </p:sp>
       <p:sp>
@@ -2219,6 +2393,34 @@
             </a:r>
             <a:endParaRPr lang="en-US" dirty="0"/>
           </a:p>
+          <a:p/>
+          <a:p>
+            <a:r>
+              <a:t>Professional insights:</a:t>
+            </a:r>
+          </a:p>
+          <a:p/>
+          <a:p>
+            <a:r>
+              <a:t>Responsiveness to signal: Effective organisations build responsiveness to external signals into their operating culture. Organisations that follow internal plans regardless of external signals miss the moments when conditions move differently from the plan.</a:t>
+            </a:r>
+          </a:p>
+          <a:p>
+            <a:r>
+              <a:t>Source: Journal, 20 February 2026 — Professional Insights: Strategy</a:t>
+            </a:r>
+          </a:p>
+          <a:p/>
+          <a:p>
+            <a:r>
+              <a:t>The wrong posture for the season: Organisations most often drift into trouble by occupying a posture suited to a different time. Diagnose what season the work is actually in and whether your position matches it.</a:t>
+            </a:r>
+          </a:p>
+          <a:p>
+            <a:r>
+              <a:t>Source: Journal, 28 May 2026 — Professional Insights: Strategy</a:t>
+            </a:r>
+          </a:p>
         </p:txBody>
       </p:sp>
       <p:sp>
@@ -2327,6 +2529,45 @@
             </a:r>
             <a:endParaRPr lang="en-US" dirty="0"/>
           </a:p>
+          <a:p/>
+          <a:p>
+            <a:r>
+              <a:t>Professional insights:</a:t>
+            </a:r>
+          </a:p>
+          <a:p/>
+          <a:p>
+            <a:r>
+              <a:t>Momentum Illusion: Organisations anchor confidence in established structures (market positions, legacy products, long-standing advantages) that are quietly on a clock. Identify which apparent permanences are temporary, and build security on what will outlast them.</a:t>
+            </a:r>
+          </a:p>
+          <a:p>
+            <a:r>
+              <a:t>Source: Journal, 29 May 2026 — Professional Insights: Strategy</a:t>
+            </a:r>
+          </a:p>
+          <a:p/>
+          <a:p>
+            <a:r>
+              <a:t>At the peak: When a business is at its peak, the disciplines that produced the peak are most at risk of being quietly abandoned. Review the practices that built the current position and name any that have been set aside.</a:t>
+            </a:r>
+          </a:p>
+          <a:p>
+            <a:r>
+              <a:t>Source: Journal, 10 June 2026 — Professional Insights: Strategy</a:t>
+            </a:r>
+          </a:p>
+          <a:p/>
+          <a:p>
+            <a:r>
+              <a:t>Execution Regression: After key milestones, strategic focus can fragment as attention shifts from enterprise outcomes to individual or team recognition. Priorities lose sharpness and execution becomes less coordinated.</a:t>
+            </a:r>
+          </a:p>
+          <a:p>
+            <a:r>
+              <a:t>Source: Journal, 21 April 2026 — Professional Insights</a:t>
+            </a:r>
+          </a:p>
         </p:txBody>
       </p:sp>
       <p:sp>
@@ -2438,6 +2679,45 @@
 - ✎ Reflection — What capability does your organisation need to begin building now — before the environment requires it — to sustain performance at the next level?</a:t>
             </a:r>
             <a:endParaRPr lang="en-US" dirty="0"/>
+          </a:p>
+          <a:p/>
+          <a:p>
+            <a:r>
+              <a:t>Professional insights:</a:t>
+            </a:r>
+          </a:p>
+          <a:p/>
+          <a:p>
+            <a:r>
+              <a:t>K · Keep: Before the environment applies its pressure, decide what must be preserved for the organisation to remain itself, and which commitments are open to negotiation.</a:t>
+            </a:r>
+          </a:p>
+          <a:p>
+            <a:r>
+              <a:t>Source: Journal, 18 March 2026 — Professional Insights</a:t>
+            </a:r>
+          </a:p>
+          <a:p/>
+          <a:p>
+            <a:r>
+              <a:t>S · Stop: Leaders accumulate programmes built to reproduce past breakthroughs. Identify one that exists mainly because something like it succeeded before, check whether it still produces the original effect, and schedule its sunset if the case for keeping it is mostly nostalgia.</a:t>
+            </a:r>
+          </a:p>
+          <a:p>
+            <a:r>
+              <a:t>Source: Journal, 6 May 2026 — Professional Insights: Leadership</a:t>
+            </a:r>
+          </a:p>
+          <a:p/>
+          <a:p>
+            <a:r>
+              <a:t>S · Start: The end of one source of revenue is the prompt to commit to the next before necessity forces a scramble. Build the transition while the old stream still trickles.</a:t>
+            </a:r>
+          </a:p>
+          <a:p>
+            <a:r>
+              <a:t>Source: Journal, 13 June 2026 — Professional Insights: Strategy</a:t>
+            </a:r>
           </a:p>
         </p:txBody>
       </p:sp>
@@ -2676,6 +2956,34 @@
 - ✎ Which force category is most actively moving in your operating environment right now? Force category How it is moving Gravity mechanism it produces Earliest evidence in daily execution</a:t>
             </a:r>
             <a:endParaRPr lang="en-US" dirty="0"/>
+          </a:p>
+          <a:p/>
+          <a:p>
+            <a:r>
+              <a:t>Professional insights:</a:t>
+            </a:r>
+          </a:p>
+          <a:p/>
+          <a:p>
+            <a:r>
+              <a:t>Cosmetic continuity: Organisations often respond to decline by reproducing the appearance of what once worked without restoring the capability, discipline or substance that made it valuable. Symbols, reports and routines remain intact while quality deteriorates. Use this with Execution Regression and Success Inertia.</a:t>
+            </a:r>
+          </a:p>
+          <a:p>
+            <a:r>
+              <a:t>Source: Journal, 18 July 2026 — Professional Insights: Strategy</a:t>
+            </a:r>
+          </a:p>
+          <a:p/>
+          <a:p>
+            <a:r>
+              <a:t>Speed and soundness: Organisations that draw their confidence from operating speed are one disruption away from a crisis they cannot outrun. Speed is an advantage; soundness is a requirement.</a:t>
+            </a:r>
+          </a:p>
+          <a:p>
+            <a:r>
+              <a:t>Source: Journal, 18 January 2026 — Professional Insights: Culture</a:t>
+            </a:r>
           </a:p>
         </p:txBody>
       </p:sp>

--- a/Unit decks/Unit 12 - Sustaining Performance.pptx
+++ b/Unit decks/Unit 12 - Sustaining Performance.pptx
@@ -531,6 +531,49 @@
             </a:r>
             <a:endParaRPr lang="en-US" dirty="0"/>
           </a:p>
+          <a:p/>
+          <a:p>
+            <a:r>
+              <a:t>Source detail (S2R® manuscript):</a:t>
+            </a:r>
+          </a:p>
+          <a:p/>
+          <a:p>
+            <a:r>
+              <a:t>Module context: Grounding is where strategy execution is sustained. It is the discipline that ensures what has been defined in Direction and driven through Influence is fully translated into consistent, lived organisational performance. Grounding carries a singular responsibility: to close the gap between what is intended and what is actually consistently realised.</a:t>
+            </a:r>
+          </a:p>
+          <a:p>
+            <a:r>
+              <a:t>Grounding establishes a non-negotiable standard: what is assigned must be fully executed; what is executed must be sustained; what is sustained must be reinforced through systems, culture, and accountability.</a:t>
+            </a:r>
+          </a:p>
+          <a:p>
+            <a:r>
+              <a:t>Within DIG: Direction defines the strategic position and intended outcomes; Influence mobilises leadership to drive execution; Grounding ensures those outcomes are consistently achieved, embedded, and maintained.</a:t>
+            </a:r>
+          </a:p>
+          <a:p>
+            <a:r>
+              <a:t>It is through Grounding that strategy moves from activity to performance, from progress to completion, and from isolated success to organisational discipline. Grounding is therefore the condition that stabilises execution into sustained results.</a:t>
+            </a:r>
+          </a:p>
+          <a:p/>
+          <a:p>
+            <a:r>
+              <a:t>Opening of the unit: You have done the hard work. Over the course of this programme you have clarified strategic direction, designed execution architecture, established accountability, aligned your enterprise conditions, measured organisational health, and coached your people through their most difficult performance conversations.</a:t>
+            </a:r>
+          </a:p>
+          <a:p>
+            <a:r>
+              <a:t>And if you have done all of that with honesty and discipline, something real has happened. The organisation has begun to move with coordination. Results are appearing. Momentum is building.</a:t>
+            </a:r>
+          </a:p>
+          <a:p>
+            <a:r>
+              <a:t>This is the moment most leadership programmes celebrate and close. We do not.</a:t>
+            </a:r>
+          </a:p>
         </p:txBody>
       </p:sp>
       <p:sp>
@@ -629,6 +672,38 @@
           <a:p/>
           <a:p>
             <a:r>
+              <a:t>Source detail (S2R® manuscript):</a:t>
+            </a:r>
+          </a:p>
+          <a:p/>
+          <a:p>
+            <a:r>
+              <a:t>Success Inertia, the greatest risk to sustained performance: Failure is visible, urgent, and impossible to ignore. Leaders respond to failure. Teams mobilise around crises. The organisation produces extraordinary effort in response to extraordinary threat. Failure is therefore the lesser threat.</a:t>
+            </a:r>
+          </a:p>
+          <a:p>
+            <a:r>
+              <a:t>The greatest threat to sustained performance is Success Inertia: the organisational belief that the formula that produced today’s win is the formula that will produce tomorrow’s survival.</a:t>
+            </a:r>
+          </a:p>
+          <a:p>
+            <a:r>
+              <a:t>History is filled with organisations that performed brilliantly within a particular configuration of the environment and then could not adapt when the environment reconfigured. They were led by capable people who had learned, correctly, that the discipline that produced the original results was worth protecting. What they had not learned was the equally important discipline of knowing when that approach had passed its point of maximum value.</a:t>
+            </a:r>
+          </a:p>
+          <a:p>
+            <a:r>
+              <a:t>Success Inertia is Performance Gravity in its most advanced form. It is the point at which the weight of past success becomes heavier than the pull of future possibility.</a:t>
+            </a:r>
+          </a:p>
+          <a:p>
+            <a:r>
+              <a:t>The KISS discipline, and specifically the Stop and Start disciplines, is designed to interrupt Success Inertia before it calcifies into institutional resistance to change.</a:t>
+            </a:r>
+          </a:p>
+          <a:p/>
+          <a:p>
+            <a:r>
               <a:t>Professional insights:</a:t>
             </a:r>
           </a:p>
@@ -751,6 +826,28 @@
 On the Navigation Chain: The chain is the practical payoff of the entire unit. Walk through it once as a group using a real example from the room before the Application exercise.</a:t>
             </a:r>
             <a:endParaRPr lang="en-US" dirty="0"/>
+          </a:p>
+          <a:p/>
+          <a:p>
+            <a:r>
+              <a:t>Source detail (S2R® manuscript):</a:t>
+            </a:r>
+          </a:p>
+          <a:p/>
+          <a:p>
+            <a:r>
+              <a:t>The section question: Where does Performance Gravity pull hardest across the enterprise?</a:t>
+            </a:r>
+          </a:p>
+          <a:p>
+            <a:r>
+              <a:t>Performance drift rarely originates in a single place. It emerges simultaneously across multiple functions, each experiencing a different form of gravitational pull in their specific domain. Without a structured framework for reading these signals early, leadership teams respond to each instance of drift as a separate, isolated problem, when in reality they are often connected expressions of a single organisational dynamic.</a:t>
+            </a:r>
+          </a:p>
+          <a:p>
+            <a:r>
+              <a:t>The executive team therefore operates as an Alignment Brigade: each CXO acting as the guardian of a specific execution stabiliser within their domain, monitoring for the early signals of Performance Gravity and applying the KISS discipline to restore and sustain performance before drift becomes deterioration.</a:t>
+            </a:r>
           </a:p>
         </p:txBody>
       </p:sp>
@@ -934,6 +1031,128 @@
             </a:r>
             <a:endParaRPr lang="en-US" dirty="0"/>
           </a:p>
+          <a:p/>
+          <a:p>
+            <a:r>
+              <a:t>Source detail (S2R® manuscript):</a:t>
+            </a:r>
+          </a:p>
+          <a:p/>
+          <a:p>
+            <a:r>
+              <a:t>For each executive role: the specific gravitational pull it faces, further detail on how drift typically emerges and on the early warning signals, and the KISS response that restores sustained performance. Drift detail and signals already listed above are left out here. Where a zone is named Leadership Drift, read it as Execution Regression showing in leadership behaviour.</a:t>
+            </a:r>
+          </a:p>
+          <a:p/>
+          <a:p>
+            <a:r>
+              <a:t>CEO · Strategic Coherence. Performance Gravity zone: Momentum Illusion at the enterprise level; the organisation mistakes past strategic wins for ongoing strategic fitness. Further drift detail: the strategic narrative begins to fragment quietly, and executive conversations revisit fundamental direction questions that should have been settled. Further signal: teams emphasise activity over strategic outcomes.</a:t>
+            </a:r>
+          </a:p>
+          <a:p>
+            <a:r>
+              <a:t>KISS response: Keep the strategic narrative visible and consistently anchored. Improve communication clarity where interpretation is diverging. Stop initiatives that cannot be clearly connected to strategic intent. Start regular enterprise-wide strategic alignment conversations.</a:t>
+            </a:r>
+          </a:p>
+          <a:p/>
+          <a:p>
+            <a:r>
+              <a:t>CFO · Capital Discipline. Performance Gravity zone: Complexity Creep in resource allocation; budget structures begin reflecting historical spending and internal influence ahead of strategic priorities. Further drift detail: resource allocation responds to legacy commitments and operational pressure ahead of forward-looking strategic investment. Strategic initiatives struggle for funding while established cost centres continue to be fully funded without scrutiny. Financial reviews focus on variance management and lose sight of strategic alignment. Further signals: budget conversations focus on cost containment and neglect strategic investment. Financial discipline becomes reactive and stops being anticipatory.</a:t>
+            </a:r>
+          </a:p>
+          <a:p>
+            <a:r>
+              <a:t>KISS response: Keep the discipline of connecting every resource allocation decision to strategic priority. Improve the rigour of zero-based reviews for legacy cost structures. Stop funding activities that cannot demonstrate strategic contribution. Start forward investment in capabilities that future performance will require.</a:t>
+            </a:r>
+          </a:p>
+          <a:p/>
+          <a:p>
+            <a:r>
+              <a:t>COO · Execution Cadence. Performance Gravity zone: Leadership Drift in operational discipline; the rigour of execution routines begins to soften as performance appears stable. Further drift detail: issues are addressed reactively, outside structured systems. The weekly rhythm that once maintained execution momentum becomes a reporting exercise and stops working as a decision mechanism. Further signals: the ad hoc interventions teams rely on take the place of structured escalation. Response times on cross-functional requests lengthen.</a:t>
+            </a:r>
+          </a:p>
+          <a:p>
+            <a:r>
+              <a:t>KISS response: Keep the discipline of the execution review rhythm and protect it explicitly from schedule pressure. Improve escalation protocols where resolution times have lengthened. Stop meetings that have become reporting rituals without decision output. Start structured early-warning reviews that detect operational drift before it becomes operational failure.</a:t>
+            </a:r>
+          </a:p>
+          <a:p/>
+          <a:p>
+            <a:r>
+              <a:t>CHRO · Organisational Health. Performance Gravity zone: Leadership Drift at the behavioural level; the standards of trust, accountability, and psychological safety that the organisation built begin to soften. Further drift detail: interpersonal friction increases subtly. Leaders become less direct in performance conversations. Accountability standards are applied unevenly. Teams begin protecting information and stop sharing it. The candour that characterised high-performing periods gives way to diplomatic management of impressions. Further signals: performance conversations becoming less direct. Health Thermometer scores declining on the Minimal Politics and High Morale traits.</a:t>
+            </a:r>
+          </a:p>
+          <a:p>
+            <a:r>
+              <a:t>KISS response: Keep the behavioural standards of trust, accountability, and psychological safety explicitly visible. Improve the directness and frequency of leadership performance conversations. Stop tolerating political behaviour or selective accountability at any seniority level. Start active reinforcement of ACE-IT behaviours as a visible leadership practice, more than a programme artefact.</a:t>
+            </a:r>
+          </a:p>
+          <a:p/>
+          <a:p>
+            <a:r>
+              <a:t>CTO / CIO · Technology Enablement. Performance Gravity zone: Complexity Creep in technology; systems that once accelerated execution become bureaucratic infrastructure that slows it. Further drift detail: new systems are added without removing old ones. Integration gaps between platforms create manual workarounds. The technology architecture becomes a record of accumulated decisions and stops being a coherent enabler of current strategy. Further signal: leaders spend increasing time reconciling data from multiple systems, leaving less time to act on it.</a:t>
+            </a:r>
+          </a:p>
+          <a:p>
+            <a:r>
+              <a:t>KISS response: Keep the systems and platforms that are genuinely accelerating decision-making and execution. Improve the integration between systems where manual reconciliation has become routine. Stop maintaining legacy systems that are consuming resource without strategic contribution. Start investment in the technology capabilities that next-phase strategy will require.</a:t>
+            </a:r>
+          </a:p>
+          <a:p/>
+          <a:p>
+            <a:r>
+              <a:t>CMO · Market Intelligence. Performance Gravity zone: Momentum Illusion in customer insight; the organisation mistakes historical market knowledge for current market understanding. Further drift detail: the organisation directs attention inward toward execution, and marketing activities increasingly reflect what the organisation knows about yesterday’s customer while what the customer requires today goes unread. Competitors begin responding faster to market shifts because they are reading signals the organisation has stopped monitoring. Further signals: competitor responsiveness to market changes accelerates relative to the organisation’s. The misalignment commercial teams report is between the organisation’s offer and current market needs.</a:t>
+            </a:r>
+          </a:p>
+          <a:p>
+            <a:r>
+              <a:t>KISS response: Keep the customer intelligence loops and market sensing disciplines that produced commercial insight during the programme. Improve the frequency and depth of customer feedback integration into strategic decisions. Stop relying on historical customer data as a proxy for current customer intelligence. Start systematic competitive monitoring and regular market recalibration conversations at the executive level.</a:t>
+            </a:r>
+          </a:p>
+          <a:p/>
+          <a:p>
+            <a:r>
+              <a:t>CCO · Revenue Conversion. Performance Gravity zone: Leadership Drift in commercial discipline; sales rigour softens as pipeline appears healthy and recent wins create confidence. Further drift detail: sales activity remains visible but conversion efficiency declines. Pipeline management becomes less structured. Customer engagement quality drops as teams manage volume and neglect relationship depth. Win rates decline before revenue figures reveal the underlying pattern. Further signals: declining win rates on competitive opportunities. Commercial teams reporting increased customer price sensitivity, which is often a signal that value proposition communication has weakened while price itself has not genuinely changed.</a:t>
+            </a:r>
+          </a:p>
+          <a:p>
+            <a:r>
+              <a:t>KISS response: Keep the commercial disciplines of structured pipeline management and rigorous customer engagement. Improve the quality of value proposition communication where win rates are declining. Stop accepting pipeline volume as a proxy for commercial health: scrutinise conversion at each stage. Start systematic post-loss analysis to understand why opportunities are being lost before the pattern becomes a trend.</a:t>
+            </a:r>
+          </a:p>
+          <a:p/>
+          <a:p>
+            <a:r>
+              <a:t>CPO · Supply Resilience. Performance Gravity zone: Complexity Creep in procurement; the accumulation of supplier relationships, procurement processes, and cost-reduction targets begins to undermine long-term supply resilience. Further drift detail: the priority given to short-term cost reduction also comes at the expense of operational continuity. The supplier base becomes fragmented. Critical dependencies develop without visibility. Procurement becomes a cost management function and stops acting as a strategic enabler of execution. Further signals: critical supply concentrations develop without leadership awareness. Procurement conversations focus narrowly on price at the expense of strategic value, resilience, and partnership quality.</a:t>
+            </a:r>
+          </a:p>
+          <a:p>
+            <a:r>
+              <a:t>KISS response: Keep strategic supplier relationships that provide resilience, capability, and long-term value beyond unit cost. Improve visibility of supply chain concentrations and dependency risks before they become operational disruptions. Stop procurement decisions driven purely by short-term cost optimisation without resilience assessment. Start strategic sourcing conversations that position procurement as a competitive advantage, beyond its cost management function.</a:t>
+            </a:r>
+          </a:p>
+          <a:p/>
+          <a:p>
+            <a:r>
+              <a:t>CRO · Risk Intelligence. Performance Gravity zone: Success Inertia in risk management; the organisation’s strong performance reduces leadership urgency around risk identification and mitigation. Further drift detail: emerging risks are acknowledged in risk registers and stay outside executive decision-making. Risk conversations become compliance exercises. The discipline of proactive risk identification weakens as recent operational success reduces the emotional salience of potential threats. Leaders make decisions with less risk scrutiny than the environment warrants. Further signals: risk registers that exist and are maintained without visibly informing strategic choices. Executive decisions made without explicit risk assessment.</a:t>
+            </a:r>
+          </a:p>
+          <a:p>
+            <a:r>
+              <a:t>KISS response: Keep the discipline of integrating risk intelligence into every major strategic and operational decision. Improve the connection between the risk register and the executive decision-making agenda. Stop treating risk management as a governance requirement separate from strategic leadership. Start proactive scenario conversations that examine what could go wrong with current performance assumptions before the environment proves them wrong.</a:t>
+            </a:r>
+          </a:p>
+          <a:p/>
+          <a:p>
+            <a:r>
+              <a:t>CSO · Strategy Translation. Performance Gravity zone: Leadership Drift in strategy-to-execution alignment; the bridge between strategic intent and operational execution weakens as the organisation becomes busy with delivery. Further drift detail: the narrative that connected individual effort to organisational direction, which was vivid during the programme, fades as the pressure of execution absorbs the space for strategic reflection. Further signals: OKRs begin to feel like performance management targets and lose their standing as strategic commitments. Execution conversations focus on activity over strategic outcome.</a:t>
+            </a:r>
+          </a:p>
+          <a:p>
+            <a:r>
+              <a:t>KISS response: Keep the discipline of connecting every operational priority explicitly to strategic intent. Improve the translation quality of strategy into OKRs and KPIs where the connection has become vague. Stop allowing operational reviews to become activity-reporting sessions without strategic context. Start regular strategy translation conversations that reconnect operational execution to strategic direction at every level of the organisation.</a:t>
+            </a:r>
+          </a:p>
         </p:txBody>
       </p:sp>
       <p:sp>
@@ -1321,6 +1540,33 @@
             </a:r>
             <a:endParaRPr lang="en-US" dirty="0"/>
           </a:p>
+          <a:p/>
+          <a:p>
+            <a:r>
+              <a:t>Source detail (S2R® manuscript):</a:t>
+            </a:r>
+          </a:p>
+          <a:p/>
+          <a:p>
+            <a:r>
+              <a:t>The Review as a leadership discipline: Throughout this programme, you have built four diagnostic instruments: the ESRG Scanner, the Enterprise COMPASS, the Organisational Health Thermometer, and now the KISS discipline. Each was introduced within a specific unit to address a specific dimension of execution.</a:t>
+            </a:r>
+          </a:p>
+          <a:p>
+            <a:r>
+              <a:t>At the summit of the DIG Framework, these tools form a single integrated operating rhythm: a structured quarterly conversation that the executive team runs together to detect drift early, maintain alignment, reinforce execution discipline, and sustain organisational performance across strategic cycles. This is the S2R® Collective Intelligence Review.</a:t>
+            </a:r>
+          </a:p>
+          <a:p>
+            <a:r>
+              <a:t>It is a collective intelligence conversation, with no reporting and no performance presentation: the discipline through which the executive team develops, shares, and acts on the accumulated insight of the full organisation’s execution experience.</a:t>
+            </a:r>
+          </a:p>
+          <a:p>
+            <a:r>
+              <a:t>When conducted consistently, the Review produces what no individual function can produce alone: a shared, real-time understanding of where the organisation is strong, where it is drifting, and what specific leadership action is required to maintain the performance trajectory.</a:t>
+            </a:r>
+          </a:p>
         </p:txBody>
       </p:sp>
       <p:sp>
@@ -1444,6 +1690,104 @@
           <a:p/>
           <a:p>
             <a:r>
+              <a:t>Source detail (S2R® manuscript):</a:t>
+            </a:r>
+          </a:p>
+          <a:p/>
+          <a:p>
+            <a:r>
+              <a:t>Four conversations in sequence, with the key questions for each:</a:t>
+            </a:r>
+          </a:p>
+          <a:p/>
+          <a:p>
+            <a:r>
+              <a:t>Conversation 1, Diagnose the Operating Conditions (ESRG Scanner; the COO leads, supported by the CTO/CIO, CHRO and CFO): The executive team begins by examining the operating conditions against the delivery of key strategic outcomes. This conversation surfaces structural bottlenecks that are not visible within individual functions. A resource constraint that appears manageable within one team may be creating capacity strain across three. A governance gap that one leader has worked around may be creating decision delays that are slowing the entire enterprise. The ESRG Scanner gives the leadership team a shared view of the structural conditions supporting execution.</a:t>
+            </a:r>
+          </a:p>
+          <a:p>
+            <a:r>
+              <a:t>Key questions: Is the physical and behavioural environment enabling the collaboration and clarity that execution requires? Are systems allowing work, data, and decisions to move smoothly across the organisation? Do teams have the capability, capacity, and sustainability required to deliver the strategy? Are decision rights clear, review forums functioning as decision mechanisms, and accountability standards applied consistently?</a:t>
+            </a:r>
+          </a:p>
+          <a:p/>
+          <a:p>
+            <a:r>
+              <a:t>Conversation 2, Align the Enterprise (Enterprise COMPASS; the CEO leads, supported by the CSO): The leadership team evaluates whether the organisation remains aligned across the seven critical execution zones: Clarity of Direction, Organisational Alignment, Management Discipline, People &amp; Capability, Allocation of Resources, Sensing &amp; Adaptation, and Systems &amp; Execution. This conversation reveals whether different parts of the organisation are interpreting strategy in the same way, or whether misalignment is beginning to emerge between levels, between functions, or between strategic intent and operational reality.</a:t>
+            </a:r>
+          </a:p>
+          <a:p>
+            <a:r>
+              <a:t>Key questions: Are leaders at every level describing strategic priorities in consistent language? Are the seven execution zones strengthening, stable, or showing signs of deterioration? Where is the organisation’s execution maturity advancing, and where is it at risk of regressing?</a:t>
+            </a:r>
+          </a:p>
+          <a:p/>
+          <a:p>
+            <a:r>
+              <a:t>Conversation 3, Apply the KISS Discipline (KISS Reflection; each CXO leads for their domain): This conversation converts individual functional experience into collective enterprise learning. A practice that one function has discovered to be highly effective may be transferable to three others. A drift pattern that one leader has identified in their team may be emerging across the organisation. A Stop decision that one executive has taken may release capacity that another is struggling to find.</a:t>
+            </a:r>
+          </a:p>
+          <a:p>
+            <a:r>
+              <a:t>The value of this conversation lies in the patterns that emerge when multiple KISS reflections are examined together, more than in the individual KISS statements. Those patterns reveal where Performance Gravity is pulling, where the organisation is building fitness, and what leadership attention is most urgently required.</a:t>
+            </a:r>
+          </a:p>
+          <a:p/>
+          <a:p>
+            <a:r>
+              <a:t>Conversation 4, Monitor the Behavioural Climate (Organisational Health Thermometer; the CHRO leads, supported by the CEO): Health Thermometer readings from different parts of the organisation are shared and compared. Patterns of variance are examined. Where early warning signals appear, leaders apply the ACE-IT behavioural guardrails (Accountability, Commitment, Engagement, Integrity, Transparency) to stabilise the environment and restore healthy execution conditions.</a:t>
+            </a:r>
+          </a:p>
+          <a:p>
+            <a:r>
+              <a:t>This conversation ensures that the Review examines structural and strategic conditions and also actively monitors the behavioural climate in which execution occurs. Because organisational health is the multiplier of every other system in the programme, its deterioration, even gradual, even localised, reduces the effectiveness of every other discipline the organisation has built.</a:t>
+            </a:r>
+          </a:p>
+          <a:p/>
+          <a:p>
+            <a:r>
+              <a:t>Integrated tool reference (what each tool examines and why it matters):</a:t>
+            </a:r>
+          </a:p>
+          <a:p>
+            <a:r>
+              <a:t>ESRG Scanner: examines whether the execution environment (Environment, Systems, Resources, Governance) enables or constrains strategic delivery. It matters because strategy often falters when the operating conditions cannot support delivery, even where the intent is sound.</a:t>
+            </a:r>
+          </a:p>
+          <a:p>
+            <a:r>
+              <a:t>Enterprise COMPASS: examines whether the organisation remains aligned across seven critical execution zones. It matters because execution requires coordinated movement; COMPASS identifies the misalignment zones that weaken coordination before they become visible in results.</a:t>
+            </a:r>
+          </a:p>
+          <a:p>
+            <a:r>
+              <a:t>KISS Reflection: examines what each domain is Keeping, Improving, Stopping, and Starting. It matters because it converts individual functional learning into collective enterprise intelligence, revealing transferable practices, shared drift patterns, and emerging capability gaps.</a:t>
+            </a:r>
+          </a:p>
+          <a:p>
+            <a:r>
+              <a:t>Organisational Health Thermometer: examines the behavioural climate across teams: trust, clarity, morale, productivity, and retention. It matters because health is the multiplier of every other system; its early deterioration reduces the effectiveness of all execution disciplines before it becomes visible in performance results.</a:t>
+            </a:r>
+          </a:p>
+          <a:p/>
+          <a:p>
+            <a:r>
+              <a:t>The outcome of consistent reviews: Conducted quarterly, with full executive participation, using all four tools, the Review develops what no individual leader can develop alone: collective execution intelligence.</a:t>
+            </a:r>
+          </a:p>
+          <a:p>
+            <a:r>
+              <a:t>The executive team becomes capable of detecting Performance Gravity before it becomes visible in results. Leaders develop a shared vocabulary for describing what the organisation is experiencing and what it requires. Collective responses are coordinated across functions, where they were functional and isolated. The organisation’s capacity to sustain performance strengthens with every review cycle.</a:t>
+            </a:r>
+          </a:p>
+          <a:p>
+            <a:r>
+              <a:t>The true outcome of DIG Strategy2Results® is an organisation that has learned, through discipline, through consistency, through the honest application of the tools built across this programme, how to keep climbing. That outcome reaches beyond a strategy that was successfully designed, a performance architecture that was carefully built, and a health temperature that was honestly measured.</a:t>
+            </a:r>
+          </a:p>
+          <a:p/>
+          <a:p>
+            <a:r>
               <a:t>Professional insights:</a:t>
             </a:r>
           </a:p>
@@ -1565,6 +1909,33 @@
 The Programme Commitment is the final output. Each leader names publicly: the force most active in their organisation, the ABCV MBT condition most under threat, and one specific KISS response with a named date. These are navigation decisions made public.</a:t>
             </a:r>
             <a:endParaRPr lang="en-US" dirty="0"/>
+          </a:p>
+          <a:p/>
+          <a:p>
+            <a:r>
+              <a:t>Source detail (S2R® manuscript):</a:t>
+            </a:r>
+          </a:p>
+          <a:p/>
+          <a:p>
+            <a:r>
+              <a:t>The section in two parts: the KISS Leadership Exercise and the Programme Commitment.</a:t>
+            </a:r>
+          </a:p>
+          <a:p>
+            <a:r>
+              <a:t>Purpose of the exercise: To practise applying the KISS discipline to a real executive domain, moving from observation to decision with precision and honesty.</a:t>
+            </a:r>
+          </a:p>
+          <a:p>
+            <a:r>
+              <a:t>The premise: Performance Gravity is already present in every organisation in this room. The four scenarios each describe a real CXO domain where a specific form of Performance Gravity has begun to emerge. Each scenario is grounded in one or two of the gravitational mechanisms: Momentum Illusion, Complexity Creep, or Leadership Drift (Execution Regression as it shows in leadership behaviour).</a:t>
+            </a:r>
+          </a:p>
+          <a:p>
+            <a:r>
+              <a:t>The problem is named in each scenario. The task is to apply the KISS discipline: to identify precisely what this leader should Keep, Improve, Stop, and Start, and to do so with the specificity that distinguishes a real decision from a general observation.</a:t>
+            </a:r>
           </a:p>
         </p:txBody>
       </p:sp>
@@ -1717,6 +2088,142 @@
             </a:r>
             <a:endParaRPr lang="en-US" dirty="0"/>
           </a:p>
+          <a:p/>
+          <a:p>
+            <a:r>
+              <a:t>Source detail (S2R® manuscript):</a:t>
+            </a:r>
+          </a:p>
+          <a:p/>
+          <a:p>
+            <a:r>
+              <a:t>The four scenarios in their source form. Settings and timings differ in places from the versions above, which are the ones to run; the detail here, the KISS discipline focus and the facilitation question for each are for the facilitator to draw on. Each scenario ends with the question of what this leader should Keep, Improve, Stop, and Start, and a four-row response table with the instruction: be specific.</a:t>
+            </a:r>
+          </a:p>
+          <a:p/>
+          <a:p>
+            <a:r>
+              <a:t>Scenario 1: The COO’s Disappearing Rhythm. Performance Gravity form: Leadership Drift (Execution Regression in leadership behaviour). KISS discipline focus: Keep + Stop.</a:t>
+            </a:r>
+          </a:p>
+          <a:p>
+            <a:r>
+              <a:t>The organisation delivered its strongest quarter in three years. The COO is proud, justifiably. The execution rhythm that produced the result was rigorous: weekly cross-functional reviews, clear escalation protocols, structured dashboard disciplines. Every leader knew where every initiative stood. Decisions were made in the room, with nothing deferred.</a:t>
+            </a:r>
+          </a:p>
+          <a:p>
+            <a:r>
+              <a:t>Three months later, the results are still acceptable. But the rhythm has quietly shifted. The weekly cross-functional review has been moved to fortnightly: “the team is performing well, we don’t need to meet as often.” The dashboard discipline has softened: leaders are updating numbers without preparing narrative. The escalation protocol has not been formally changed, but issues that would previously have been escalated within 24 hours are now sitting with teams for a week before reaching the COO’s desk.</a:t>
+            </a:r>
+          </a:p>
+          <a:p>
+            <a:r>
+              <a:t>The COO does not see this as a problem. The results are still acceptable. The team seems settled. The urgency of the rebuilding period has passed.</a:t>
+            </a:r>
+          </a:p>
+          <a:p>
+            <a:r>
+              <a:t>Facilitation question: Which of the four KISS disciplines is the COO most at risk of neglecting, and what is the leadership cost if that neglect continues for another two quarters?</a:t>
+            </a:r>
+          </a:p>
+          <a:p/>
+          <a:p>
+            <a:r>
+              <a:t>Scenario 2: The CFO’s Legacy Budget. Performance Gravity form: Complexity Creep. KISS discipline focus: Stop + Start.</a:t>
+            </a:r>
+          </a:p>
+          <a:p>
+            <a:r>
+              <a:t>The organisation is twelve months into a three-year strategy. The CFO oversaw a rigorous zero-based budgeting exercise at the start of the strategic cycle that aligned resource allocation precisely with strategic priorities. The process was difficult, politically demanding, and ultimately successful. Strategic initiatives were funded. Legacy cost centres were scrutinised. The organisation began the strategic cycle with resource discipline.</a:t>
+            </a:r>
+          </a:p>
+          <a:p>
+            <a:r>
+              <a:t>But the environment has moved. Two of the three strategic priorities have evolved significantly in scope. One has been deprioritised following a market shift. New capabilities that the strategy now requires (in digital infrastructure, in data analytics, in customer experience technology) were not in the original budget and are currently underfunded.</a:t>
+            </a:r>
+          </a:p>
+          <a:p>
+            <a:r>
+              <a:t>Meanwhile, the budget structures established at the start of the cycle continue to operate largely unchanged. The legacy cost centres that were scrutinised twelve months ago have quietly re-established their original funding levels. The new capability investments that future performance requires are not yet visible in the budget.</a:t>
+            </a:r>
+          </a:p>
+          <a:p>
+            <a:r>
+              <a:t>The CFO is managing the budget competently. But the budget no longer reflects the strategy.</a:t>
+            </a:r>
+          </a:p>
+          <a:p>
+            <a:r>
+              <a:t>Facilitation question: What is the difference between a budget that reflects the strategy and a budget that reflects the organisation’s history? Which one does your organisation currently have?</a:t>
+            </a:r>
+          </a:p>
+          <a:p/>
+          <a:p>
+            <a:r>
+              <a:t>Scenario 3: The CMO’s Comfortable Intelligence. Performance Gravity form: Momentum Illusion. KISS discipline focus: Improve + Start.</a:t>
+            </a:r>
+          </a:p>
+          <a:p>
+            <a:r>
+              <a:t>The CMO leads a marketing function that performed exceptionally during the programme’s first phase. The marketing team built a reputation internally for commercial intelligence and strategic contribution. The CMO is regarded as one of the organisation’s strongest functional leaders.</a:t>
+            </a:r>
+          </a:p>
+          <a:p>
+            <a:r>
+              <a:t>But the customer intelligence that underpinned this performance was built eighteen months ago. The customer research, the segmentation model, the insight about customer needs and expectations that shaped the marketing strategy: all of it reflects who the customer was then.</a:t>
+            </a:r>
+          </a:p>
+          <a:p>
+            <a:r>
+              <a:t>The marketing team is executing with discipline. Campaigns are running. Content is being produced. Channel performance is being monitored. But the foundational intelligence that the strategy rests on has not been meaningfully updated. The CMO assumes that what worked last year still reflects current reality because nothing has explicitly told her otherwise.</a:t>
+            </a:r>
+          </a:p>
+          <a:p>
+            <a:r>
+              <a:t>Meanwhile, two competitors have begun positioning in ways that suggest they are reading customer signals the CMO’s team has not picked up. A subset of existing customers has begun raising questions in account reviews that suggest their expectations have shifted. These signals are present. They are not being systematically read.</a:t>
+            </a:r>
+          </a:p>
+          <a:p>
+            <a:r>
+              <a:t>Facilitation question: What is the difference between marketing intelligence and marketing activity? Which one is this CMO’s team strong on right now?</a:t>
+            </a:r>
+          </a:p>
+          <a:p/>
+          <a:p>
+            <a:r>
+              <a:t>Scenario 4: The CRO’s Comfortable Risk Register. Performance Gravity form: Success Inertia. KISS discipline focus: Stop + Start + Improve.</a:t>
+            </a:r>
+          </a:p>
+          <a:p>
+            <a:r>
+              <a:t>The CRO has built what is widely regarded as the most comprehensive risk register in the organisation’s history. It is current, well-maintained, clearly structured, and regularly reviewed by the board. The governance process around risk identification and reporting is robust and has received consistently positive audit feedback.</a:t>
+            </a:r>
+          </a:p>
+          <a:p>
+            <a:r>
+              <a:t>The problem is that the risk register has become the risk conversation.</a:t>
+            </a:r>
+          </a:p>
+          <a:p>
+            <a:r>
+              <a:t>The risk register has stopped informing executive decision-making and has become the evidence that risk management is being done. Leaders review it, note that it has been updated, confirm that the ratings are within acceptable parameters, and move on. The risk register exists as a governance artefact and is not used as a strategic tool.</a:t>
+            </a:r>
+          </a:p>
+          <a:p>
+            <a:r>
+              <a:t>Three strategic decisions taken in the past six months were made without explicit risk assessment in the executive conversation. The CRO was present in all three discussions but did not bring the risk perspective to bear because the formal risk review was scheduled for the following week’s governance meeting. By the time the formal review occurred, the decisions had been made.</a:t>
+            </a:r>
+          </a:p>
+          <a:p>
+            <a:r>
+              <a:t>Two of those three decisions have since generated operational surprises that a structured risk conversation would likely have anticipated.</a:t>
+            </a:r>
+          </a:p>
+          <a:p>
+            <a:r>
+              <a:t>Facilitation question: What is the difference between a risk register and a risk discipline? Which one is this organisation actually practising?</a:t>
+            </a:r>
+          </a:p>
         </p:txBody>
       </p:sp>
       <p:sp>
@@ -1827,6 +2334,66 @@
           <a:p/>
           <a:p>
             <a:r>
+              <a:t>Source detail (S2R® manuscript):</a:t>
+            </a:r>
+          </a:p>
+          <a:p/>
+          <a:p>
+            <a:r>
+              <a:t>Context for the commitment: This is the final exercise of the DIG expedition. You have spent the course of this programme building something real. You have clarified where your organisation is going. You have designed the architecture of accountability. You have diagnosed the conditions of execution. You have measured the health of the human system that carries the strategy. You have coached the difficult conversations that health requires.</a:t>
+            </a:r>
+          </a:p>
+          <a:p>
+            <a:r>
+              <a:t>None of that disappears when you leave this room. But neither does Performance Gravity.</a:t>
+            </a:r>
+          </a:p>
+          <a:p>
+            <a:r>
+              <a:t>The disciplines you have built are real. And they are vulnerable: to urgency, to distraction, to the quiet erosion of standards that always follows the reduction of pressure, and to the belief that because you have done the work, the work will sustain itself.</a:t>
+            </a:r>
+          </a:p>
+          <a:p>
+            <a:r>
+              <a:t>It will not sustain itself. It will sustain you, if you choose to sustain it.</a:t>
+            </a:r>
+          </a:p>
+          <a:p/>
+          <a:p>
+            <a:r>
+              <a:t>How the commitment runs: Each leader answers the three questions aloud, with the full group as witness. The facilitator captures every commitment visibly. These commitments are the output of the programme.</a:t>
+            </a:r>
+          </a:p>
+          <a:p/>
+          <a:p>
+            <a:r>
+              <a:t>The three questions in their source form, for the facilitator to draw on alongside the questions above (Leadership Drift is Execution Regression as it shows in leadership behaviour):</a:t>
+            </a:r>
+          </a:p>
+          <a:p>
+            <a:r>
+              <a:t>Question 1: “Where in my organisation is Performance Gravity already pulling, and which of the three mechanisms (Momentum Illusion, Complexity Creep, or Leadership Drift) is the most active right now?” Be specific. Name the domain. Name the mechanism. Name the evidence you have already seen.</a:t>
+            </a:r>
+          </a:p>
+          <a:p>
+            <a:r>
+              <a:t>Question 2: “Which of the four KISS disciplines am I most at risk of neglecting under pressure, and what is my honest reason for that?” The answer to this question is the single most important piece of self-knowledge a leader can carry out of this programme.</a:t>
+            </a:r>
+          </a:p>
+          <a:p>
+            <a:r>
+              <a:t>Question 3: “What is the one commitment I am making to this team (specific, named, dated) before we leave this room?” One commitment: a named action, with a named date, that this group will hold you to at the next review. A general intention or an aspiration does not meet this standard.</a:t>
+            </a:r>
+          </a:p>
+          <a:p/>
+          <a:p>
+            <a:r>
+              <a:t>The programme ends with a room full of leaders who have named their vulnerabilities, accepted their responsibilities, and made their commitments publicly. That is the summit.</a:t>
+            </a:r>
+          </a:p>
+          <a:p/>
+          <a:p>
+            <a:r>
               <a:t>Professional insights:</a:t>
             </a:r>
           </a:p>
@@ -2053,6 +2620,94 @@
           <a:p/>
           <a:p>
             <a:r>
+              <a:t>Source detail (S2R® manuscript):</a:t>
+            </a:r>
+          </a:p>
+          <a:p/>
+          <a:p>
+            <a:r>
+              <a:t>The unit by stage, in the wording of the source summary:</a:t>
+            </a:r>
+          </a:p>
+          <a:p>
+            <a:r>
+              <a:t>Awareness (What): Leaders are introduced to Performance Gravity: the natural force that pulls organisations back toward average after periods of strong performance. It operates through three mechanisms: Momentum Illusion, the belief that past discipline is sustaining present performance; Complexity Creep, the accumulation of structures, processes, and initiatives that once served a purpose and have since become weight; and Execution Regression, seen in leadership behaviour as Leadership Drift, the gradual softening of the behavioural standards that produced the original results.</a:t>
+            </a:r>
+          </a:p>
+          <a:p>
+            <a:r>
+              <a:t>The antidote to Performance Gravity is KISS: Keep what is working and must be protected, Improve what has shifted and requires recalibration, Stop what is harming performance and must be eliminated, and Start what needs to be introduced to sustain the next level of performance. KISS is a set of four precise decisions that every leader must make at the end of every performance cycle. It is more than a reflection template.</a:t>
+            </a:r>
+          </a:p>
+          <a:p>
+            <a:r>
+              <a:t>Intelligence (Why): Leaders understand why sustaining performance requires a fundamentally different discipline from achieving it. Achieving performance is a finite game: it has a target and a finish line. Sustaining performance is an infinite game: the objective is to remain capable of playing at an increasingly high level as the environment continuously recalibrates.</a:t>
+            </a:r>
+          </a:p>
+          <a:p>
+            <a:r>
+              <a:t>The greatest risk to sustained performance is Success Inertia: the organisational conviction that the formula that produced today’s win will produce tomorrow’s survival. The KISS discipline, particularly the Stop and Start disciplines, is designed to interrupt it before it calcifies into institutional resistance to change.</a:t>
+            </a:r>
+          </a:p>
+          <a:p>
+            <a:r>
+              <a:t>Extrapolating (Where): Performance drift emerges simultaneously across the executive stabilisers managed by each CXO role: strategic coherence, capital discipline, operational rhythm, organisational health, technology enablement, market intelligence, revenue conversion, supply resilience, risk intelligence, and strategy translation. The executive team therefore operates as an Alignment Brigade: each leader monitoring the gravitational pull specific to their domain, reading the early warning signals that indicate drift is emerging, and applying the KISS discipline to restore sustained performance before drift becomes deterioration.</a:t>
+            </a:r>
+          </a:p>
+          <a:p>
+            <a:r>
+              <a:t>Integration (Collective): The four instruments built across this programme (the ESRG Scanner, the Enterprise COMPASS, the KISS Reflection, and the Organisational Health Thermometer) are brought together in the S2R® Collective Intelligence Review: a structured quarterly collective intelligence conversation through which the executive team diagnoses operating conditions, maintains enterprise alignment, reinforces execution discipline, and monitors the behavioural climate of the organisation. When the Review is conducted consistently, the organisation develops collective execution intelligence: the shared, real-time awareness of where performance is strengthening, where it is drifting, and what leadership action is required to sustain the trajectory.</a:t>
+            </a:r>
+          </a:p>
+          <a:p>
+            <a:r>
+              <a:t>Application (In Practice): The KISS Leadership Exercise grounds the discipline in four real CXO scenarios, each describing a specific form of Performance Gravity in a specific executive domain. Leaders practise applying the four KISS decisions with the precision and honesty that the discipline requires. The Programme Commitment closes the unit and the expedition: each leader publicly names where Performance Gravity is already pulling in their organisation, which KISS discipline they are most at risk of neglecting, and one specific commitment (named, dated, and witnessed by the full group) that they will keep before the next review.</a:t>
+            </a:r>
+          </a:p>
+          <a:p/>
+          <a:p>
+            <a:r>
+              <a:t>The closing statement of the DIG expedition, in full:</a:t>
+            </a:r>
+          </a:p>
+          <a:p>
+            <a:r>
+              <a:t>You leave with something more durable than a strategy. You leave with the understanding that strategy is the organisation’s direction. Its ceiling is set by the conditions you create for the people who must deliver it: the clarity of the environment, the health of the culture, the rigour of the systems, the honesty of the conversations, and the consistency of the standards you hold even when no one is watching and the pressure is off.</a:t>
+            </a:r>
+          </a:p>
+          <a:p>
+            <a:r>
+              <a:t>Across the course of this programme, you have built each of these conditions deliberately.</a:t>
+            </a:r>
+          </a:p>
+          <a:p>
+            <a:r>
+              <a:t>You have clarified direction so that your organisation knows where it is climbing. You have designed execution so that effort converts into results. You have established accountability so that standards have teeth. You have aligned your enterprise conditions so that the system supports the strategy. You have measured health so that you can hear the early signals. You have coached the difficult conversations that health requires. And now you have named the discipline that sustains everything you have built.</a:t>
+            </a:r>
+          </a:p>
+          <a:p>
+            <a:r>
+              <a:t>The DIG Framework is a leadership posture you inhabit continuously: reading the environment, maintaining the conditions, correcting early, protecting what works, eliminating what doesn’t, and building what the next level of performance will require before it requires it. Implementing it once does not complete it.</a:t>
+            </a:r>
+          </a:p>
+          <a:p>
+            <a:r>
+              <a:t>The summit of this expedition is not a destination.</a:t>
+            </a:r>
+          </a:p>
+          <a:p>
+            <a:r>
+              <a:t>Every organisation that has ever achieved something great and then lost it lost it gradually, through the quiet accumulation of compromises that each felt individually justified and were collectively devastating and entirely avoidable. A single catastrophic failure was never the cause.</a:t>
+            </a:r>
+          </a:p>
+          <a:p>
+            <a:r>
+              <a:t>Leadership discipline is as real as Performance Gravity when it is chosen deliberately, maintained consistently, and renewed publicly by leaders who understand what they are building and why it matters.</a:t>
+            </a:r>
+          </a:p>
+          <a:p/>
+          <a:p>
+            <a:r>
               <a:t>Professional insights:</a:t>
             </a:r>
           </a:p>
@@ -2273,6 +2928,28 @@
           <a:p/>
           <a:p>
             <a:r>
+              <a:t>Source detail (S2R® manuscript):</a:t>
+            </a:r>
+          </a:p>
+          <a:p/>
+          <a:p>
+            <a:r>
+              <a:t>The opening question: What is sustained performance, and what threatens it?</a:t>
+            </a:r>
+          </a:p>
+          <a:p>
+            <a:r>
+              <a:t>The moment when results appear and momentum builds is precisely the moment where most organisations begin to lose what they have built. The loss comes without failure and without crisis, through the quiet, invisible, almost unnoticeable force that pulls every organisation back toward the performance of the average. We call this force Performance Gravity.</a:t>
+            </a:r>
+          </a:p>
+          <a:p>
+            <a:r>
+              <a:t>Understanding it, and building the discipline to resist it, is the final and most important leadership work of this programme.</a:t>
+            </a:r>
+          </a:p>
+          <a:p/>
+          <a:p>
+            <a:r>
               <a:t>Professional insights:</a:t>
             </a:r>
           </a:p>
@@ -2396,6 +3073,23 @@
           <a:p/>
           <a:p>
             <a:r>
+              <a:t>Source detail (S2R® manuscript):</a:t>
+            </a:r>
+          </a:p>
+          <a:p/>
+          <a:p>
+            <a:r>
+              <a:t>Performance Gravity defined: Performance Gravity is the natural organisational tendency to drift back toward average after periods of strong performance. Leaders keep trying; success quietly erodes the very disciplines that produced it.</a:t>
+            </a:r>
+          </a:p>
+          <a:p>
+            <a:r>
+              <a:t>Performance Gravity is distinct from failure and from crisis. It stays invisible in most performance dashboards until it is too late to address without significant cost.</a:t>
+            </a:r>
+          </a:p>
+          <a:p/>
+          <a:p>
+            <a:r>
               <a:t>Professional insights:</a:t>
             </a:r>
           </a:p>
@@ -2532,6 +3226,91 @@
           <a:p/>
           <a:p>
             <a:r>
+              <a:t>Source detail (S2R® manuscript):</a:t>
+            </a:r>
+          </a:p>
+          <a:p/>
+          <a:p>
+            <a:r>
+              <a:t>How the mechanisms relate: Performance Gravity operates through three mechanisms that compound one another over time. The detail below describes how each one takes hold inside the organisation.</a:t>
+            </a:r>
+          </a:p>
+          <a:p/>
+          <a:p>
+            <a:r>
+              <a:t>Momentum Illusion in full: When an organisation achieves strong results, a dangerous misinterpretation often follows. Leaders begin to attribute ongoing performance to current capability, when it is the accumulated effect of past discipline. The organisation is still moving forward, coasting on the energy of disciplines that were established months ago and are not being actively maintained today.</a:t>
+            </a:r>
+          </a:p>
+          <a:p>
+            <a:r>
+              <a:t>The organisation mistakes the residual effect of past rigour for evidence of present strength. Meetings become slightly less structured. Accountability conversations become slightly less direct. Review cycles become slightly less rigorous. Each individual change is small enough to justify. Together, they represent the beginning of a performance decline that will only become visible in results six to twelve months later.</a:t>
+            </a:r>
+          </a:p>
+          <a:p>
+            <a:r>
+              <a:t>By the time the numbers reveal the problem, the disciplines that produced the original results have already significantly weakened. Rebuilding them is far more costly than maintaining them would have been.</a:t>
+            </a:r>
+          </a:p>
+          <a:p>
+            <a:r>
+              <a:t>This is the first face of Performance Gravity: the illusion that momentum is self-sustaining.</a:t>
+            </a:r>
+          </a:p>
+          <a:p/>
+          <a:p>
+            <a:r>
+              <a:t>Complexity Creep in full: High-performing organisations attract initiatives. Success generates confidence, confidence generates ambition, and ambition generates proliferation. New projects are launched. New committees are formed. New reporting requirements are introduced. New approval pathways are added.</a:t>
+            </a:r>
+          </a:p>
+          <a:p>
+            <a:r>
+              <a:t>Each addition appears justified at the time of its introduction. Collectively, however, they create an organisation that is progressively heavier, slower, and more internally focused than it needs to be.</a:t>
+            </a:r>
+          </a:p>
+          <a:p>
+            <a:r>
+              <a:t>Complexity Creep is the accumulation of weight that once served a purpose and has since become drag. The meeting that was useful when the team was new and needed coordination is now a bureaucratic ritual. The approval process that was essential during a period of risk is now slowing decisions that carry no meaningful risk. The reporting requirement that once generated genuine insight is now consumed without informing any decision.</a:t>
+            </a:r>
+          </a:p>
+          <a:p>
+            <a:r>
+              <a:t>Leaders know these things have become drag. But they are too busy managing the complexity to stop and remove it.</a:t>
+            </a:r>
+          </a:p>
+          <a:p>
+            <a:r>
+              <a:t>This is the second face of Performance Gravity: the weight of accumulated structure that no longer serves the mission.</a:t>
+            </a:r>
+          </a:p>
+          <a:p/>
+          <a:p>
+            <a:r>
+              <a:t>Leadership Drift (the third mechanism, Execution Regression, as it shows in leadership behaviour): The most dangerous form of Performance Gravity operates at the level of leadership behaviour.</a:t>
+            </a:r>
+          </a:p>
+          <a:p>
+            <a:r>
+              <a:t>When organisations are performing well, the urgency that once made difficult leadership behaviours feel necessary begins to fade. The honest performance conversation that was non-negotiable during a period of underperformance becomes slightly more diplomatic when results are strong. The accountability standard that was upheld with discipline during a period of rebuilding is applied slightly more flexibly when the pressure is off.</a:t>
+            </a:r>
+          </a:p>
+          <a:p>
+            <a:r>
+              <a:t>These shifts happen without conscious decision. They are the natural human response to a perceived reduction in threat. And they are catastrophically expensive, because the behaviours that leaders relax when performance is strong are precisely the behaviours that produced the strong performance in the first place.</a:t>
+            </a:r>
+          </a:p>
+          <a:p>
+            <a:r>
+              <a:t>Leadership Drift is what happens when success teaches leaders the wrong lesson: that the discipline was necessary only to get here. The discipline is necessary to stay here.</a:t>
+            </a:r>
+          </a:p>
+          <a:p>
+            <a:r>
+              <a:t>This is the third face of Performance Gravity: the gradual softening of the leadership standards that produced the original results.</a:t>
+            </a:r>
+          </a:p>
+          <a:p/>
+          <a:p>
+            <a:r>
               <a:t>Professional insights:</a:t>
             </a:r>
           </a:p>
@@ -2683,6 +3462,230 @@
           <a:p/>
           <a:p>
             <a:r>
+              <a:t>Source detail (S2R® manuscript):</a:t>
+            </a:r>
+          </a:p>
+          <a:p/>
+          <a:p>
+            <a:r>
+              <a:t>KISS as the antidote to Performance Gravity: The discipline that counters Performance Gravity is a set of four precise decisions that every leader must make at the end of every performance cycle, applied with the same honesty and rigour they brought to the beginning of the programme. No new framework is needed.</a:t>
+            </a:r>
+          </a:p>
+          <a:p>
+            <a:r>
+              <a:t>KISS (Keep, Improve, Stop, Start) is the sustained performance discipline of the S2R® programme. It was introduced earlier in the programme as a simplicity principle. In this final unit, it becomes its most important application: the leadership discipline that determines whether the organisation keeps climbing or begins its descent.</a:t>
+            </a:r>
+          </a:p>
+          <a:p/>
+          <a:p>
+            <a:r>
+              <a:t>The four KISS disciplines in depth:</a:t>
+            </a:r>
+          </a:p>
+          <a:p/>
+          <a:p>
+            <a:r>
+              <a:t>KEEP, the leadership discipline of protection: Most leaders underestimate how vulnerable effective practices are. An effective practice depends on a specific combination of leadership attention, team behaviour, structural support, and time investment. Remove or weaken any of these elements and the practice degrades, often without any visible signal until the results it was producing begin to decline.</a:t>
+            </a:r>
+          </a:p>
+          <a:p>
+            <a:r>
+              <a:t>Naming and protecting what works sounds obvious. It is rarely done. In most organisations, what works is taken for granted. Leaders assume that because something is working, it will continue working without deliberate protection. Effective practices depend on specific behaviours, specific rhythms, and specific leadership attention. When that attention is redirected, even toward other important priorities, the practice quietly degrades.</a:t>
+            </a:r>
+          </a:p>
+          <a:p>
+            <a:r>
+              <a:t>The discipline of Keep requires leaders to conduct a deliberate audit of their highest-value practices at the end of each performance cycle: what specifically is producing the results we are currently generating, and what would need to be true to ensure it continues?</a:t>
+            </a:r>
+          </a:p>
+          <a:p>
+            <a:r>
+              <a:t>This audit surfaces three categories of at-risk practices:</a:t>
+            </a:r>
+          </a:p>
+          <a:p>
+            <a:r>
+              <a:t>- Attention-dependent practices: routines that function well when leadership is actively engaged and quietly degrade when attention is redirected elsewhere. The weekly performance review that is meaningful when the leader prepares thoroughly and asks precise questions becomes a reporting ritual when the leader arrives distracted and accepts general updates. The discipline has not been officially removed. It has simply been emptied of the leadership intention that made it effective.</a:t>
+            </a:r>
+          </a:p>
+          <a:p>
+            <a:r>
+              <a:t>- Resource-dependent practices: capabilities that require specific investment to function and are vulnerable to budget pressure, talent loss, or competing priorities. When the person who understands the system leaves, or when the budget is redirected, the practice continues in name and loses its substance.</a:t>
+            </a:r>
+          </a:p>
+          <a:p>
+            <a:r>
+              <a:t>- Culture-dependent practices: behaviours that depend on specific norms of honesty, accountability, and psychological safety. These are the most fragile practices in any organisation because they cannot be codified into a process or a system. They exist in the behavioural choices of individuals and are directly vulnerable to Leadership Drift.</a:t>
+            </a:r>
+          </a:p>
+          <a:p>
+            <a:r>
+              <a:t>The Keep discipline requires leaders to name which category each high-value practice belongs to, and to design specific protection mechanisms that address the vulnerability specific to that category.</a:t>
+            </a:r>
+          </a:p>
+          <a:p/>
+          <a:p>
+            <a:r>
+              <a:t>IMPROVE, the leadership discipline of early correction: The most important word in the KISS Improve discipline is early.</a:t>
+            </a:r>
+          </a:p>
+          <a:p>
+            <a:r>
+              <a:t>Every leader knows how to respond to clear failure. The results are bad, the gap is visible, the urgency is undeniable. Organisations mobilise enormous energy in response to obvious performance shortfalls. That response is crisis management.</a:t>
+            </a:r>
+          </a:p>
+          <a:p>
+            <a:r>
+              <a:t>The discipline of Improve is responding to the signal before it becomes the crisis. It is the leadership capacity to notice, and act on, the early signs that a practice is drifting, a standard is softening, or a system is losing its effectiveness, at a point when the cost of correction is still small.</a:t>
+            </a:r>
+          </a:p>
+          <a:p>
+            <a:r>
+              <a:t>This requires leaders to cultivate a specific kind of organisational attention: the ability to distinguish between a result that is acceptable and a trend that is declining. The quarter’s results may be on target. But the quality of the performance review conversations is slightly lower than three months ago. The number of issues being escalated has increased slightly. The response time on cross-functional requests has lengthened by two days on average. None of these individually triggers concern. Together, they are the fingerprint of a system beginning to drift.</a:t>
+            </a:r>
+          </a:p>
+          <a:p>
+            <a:r>
+              <a:t>Improve requires leaders to act on these signals with precise, early correction: one clear adjustment, implemented quickly, that restores the standard before the drift becomes a gap and the gap becomes a trend. Dramatic intervention is unnecessary.</a:t>
+            </a:r>
+          </a:p>
+          <a:p>
+            <a:r>
+              <a:t>The leadership cost of neglecting Improve is that early corrections that would have cost a conversation become later interventions that cost a restructuring.</a:t>
+            </a:r>
+          </a:p>
+          <a:p>
+            <a:r>
+              <a:t>Improve operates in the space between what is working and what is broken. The hardest leadership skill in sustaining performance is responding to the early signs of decline when results are still acceptable. The discipline of Improve is the antidote to Leadership Drift (Execution Regression in leadership behaviour) in its earliest stage, before drift becomes departure.</a:t>
+            </a:r>
+          </a:p>
+          <a:p/>
+          <a:p>
+            <a:r>
+              <a:t>STOP, the leadership discipline of elimination: Of the four KISS disciplines, Stop is the one most organisations understand intellectually and most consistently fail to practise.</a:t>
+            </a:r>
+          </a:p>
+          <a:p>
+            <a:r>
+              <a:t>The reason is structural. Organisations are extraordinarily good at starting things and extraordinarily poor at stopping them. Every initiative that is launched has a sponsor, a team, a budget, and a set of stakeholders whose interests are served by its continuation. To stop the initiative requires the leader to confront each of these stakeholders and to make the argument, against the weight of existing investment and existing commitment, that the continuation cost exceeds the continuation value.</a:t>
+            </a:r>
+          </a:p>
+          <a:p>
+            <a:r>
+              <a:t>This is socially and politically difficult even when it is strategically obvious. And when performance is strong, the urgency of elimination diminishes further. The organisation can afford to carry the weight. For now.</a:t>
+            </a:r>
+          </a:p>
+          <a:p>
+            <a:r>
+              <a:t>The discipline of Stop requires leaders to apply a single, ruthless question to every meeting, process, initiative, reporting requirement, approval layer, and committee they currently operate: if we were designing this organisation today, knowing what we know, would we introduce this?</a:t>
+            </a:r>
+          </a:p>
+          <a:p>
+            <a:r>
+              <a:t>If the answer is no (and in most organisations the honest answer for a significant proportion of current practices is no), then the next question is when and how to stop it.</a:t>
+            </a:r>
+          </a:p>
+          <a:p>
+            <a:r>
+              <a:t>Organisations that sustain performance over long strategic cycles are distinguished by how precisely they select what they carry. Every unnecessary practice is wasteful in isolation, and it is also a claim on the organisational attention that should be available for the practices that matter.</a:t>
+            </a:r>
+          </a:p>
+          <a:p>
+            <a:r>
+              <a:t>Every organisation carries the weight of practices that consume energy without commensurate value. Almost no organisation systematically removes it. Stop is neglected because stopping things is harder than starting them. Starting something new generates visible activity, apparent progress, and the social reward of initiative. Stopping something requires the acknowledgement that a previous decision was wrong, wasteful, or at least no longer relevant. It requires leaders to disappoint the people who benefit from the existing arrangement. It requires courage that is easy to defer. The organisations that sustain performance over long strategic cycles are the ones that are ruthless about what they carry. Every practice that should be stopped and is left in place becomes weight that slows every other initiative in the organisation.</a:t>
+            </a:r>
+          </a:p>
+          <a:p>
+            <a:r>
+              <a:t>The discipline of Stop is an act of strategic care for the organisation’s most finite and most valuable resource: leadership attention.</a:t>
+            </a:r>
+          </a:p>
+          <a:p/>
+          <a:p>
+            <a:r>
+              <a:t>START, the leadership discipline of anticipation: Start asks leaders to answer a question that is genuinely difficult to sit with when current performance is strong: what is the organisation not yet capable of that future performance will require?</a:t>
+            </a:r>
+          </a:p>
+          <a:p>
+            <a:r>
+              <a:t>This is uncomfortable precisely because strong current results create the social and psychological conditions in which it feels premature, even ungrateful, to be discussing insufficiency. The team is performing well. The strategy is delivering. The indicators are positive. Why introduce the anxiety of inadequacy into a high-performing environment?</a:t>
+            </a:r>
+          </a:p>
+          <a:p>
+            <a:r>
+              <a:t>Because the environment is already changing. Because the capability that will be required six months from now needs to be built now, before it is required, if it is to be available when the need arrives. Because anticipatory investment is categorically less expensive than reactive remediation.</a:t>
+            </a:r>
+          </a:p>
+          <a:p>
+            <a:r>
+              <a:t>Start requires leaders to examine three dimensions of organisational capability:</a:t>
+            </a:r>
+          </a:p>
+          <a:p>
+            <a:r>
+              <a:t>- Emerging strategic requirements: what shifts in customer expectation, competitive positioning, or regulatory environment are beginning to emerge that will place new demands on the organisation’s capabilities?</a:t>
+            </a:r>
+          </a:p>
+          <a:p>
+            <a:r>
+              <a:t>- Internal capability gaps: where is the organisation beginning to stretch beyond the capacity of its current systems, processes, or people in ways that are not yet crisis but will become so as ambition continues to grow?</a:t>
+            </a:r>
+          </a:p>
+          <a:p>
+            <a:r>
+              <a:t>- Leadership development: which leaders in the organisation are being prepared to sustain performance at the next level of scale and complexity, and what is being invested in that development now?</a:t>
+            </a:r>
+          </a:p>
+          <a:p>
+            <a:r>
+              <a:t>Start is the forward-facing dimension of KISS. It requires leaders to look beyond current performance and ask: what does the organisation need to develop, introduce, or build now, before the environment requires it, in order to sustain performance at the next level? Start is anticipatory. Sustaining performance requires that leaders are continuously investing in the capabilities, systems, and practices that future performance will depend on, even when current performance does not yet require them. The discipline of Start is the antidote to the complacency that strong current performance can produce. It is the leadership answer to the question that Performance Gravity asks of every high-performing organisation: what comes next, and are you ready for it?</a:t>
+            </a:r>
+          </a:p>
+          <a:p>
+            <a:r>
+              <a:t>Start is the discipline that ensures the organisation is performing today and building the capability to perform tomorrow.</a:t>
+            </a:r>
+          </a:p>
+          <a:p/>
+          <a:p>
+            <a:r>
+              <a:t>The KISS performance rhythm: KISS operates as a monthly individual discipline and a quarterly team and enterprise discipline.</a:t>
+            </a:r>
+          </a:p>
+          <a:p>
+            <a:r>
+              <a:t>Individual level: each leader applies KISS to their own domain at the close of each review cycle, naming one Keep, one Improve, one Stop, and one Start. Aspirational statements do not qualify.</a:t>
+            </a:r>
+          </a:p>
+          <a:p>
+            <a:r>
+              <a:t>Team level: the leader consolidates individual KISS reflections into a Team KISS Profile: the shared practices being kept, the shared drift points being corrected, the shared weight being removed, and the shared capabilities being built.</a:t>
+            </a:r>
+          </a:p>
+          <a:p>
+            <a:r>
+              <a:t>Enterprise level: the executive team conducts a quarterly review, a structured collective intelligence conversation that applies KISS across the full organisation. This is the S2R® Collective Intelligence Review of Section 4, and it is the sustained performance operating rhythm that the programme has been building toward.</a:t>
+            </a:r>
+          </a:p>
+          <a:p/>
+          <a:p>
+            <a:r>
+              <a:t>Why KISS is the right instrument for sustained performance: The KISS discipline requires four decisions: applied consistently, applied honestly, and applied at every level of the organisation in a cascading rhythm that converts individual learning into collective intelligence. It needs no new system, no new team, and no new strategy.</a:t>
+            </a:r>
+          </a:p>
+          <a:p>
+            <a:r>
+              <a:t>This is precisely what makes it durable. The organisations that sustain performance over long cycles are the ones that build the simplest disciplines into the most consistent rhythms and maintain those rhythms when performance pressure would make it easy to abandon them. Sophisticated tools are not what sets them apart.</a:t>
+            </a:r>
+          </a:p>
+          <a:p>
+            <a:r>
+              <a:t>KISS is the final discipline of the S2R® programme because it is the discipline that determines whether everything else the programme has built will be maintained, strengthened, and grown, or gradually dismantled by the quiet, relentless force of Performance Gravity.</a:t>
+            </a:r>
+          </a:p>
+          <a:p/>
+          <a:p>
+            <a:r>
               <a:t>Professional insights:</a:t>
             </a:r>
           </a:p>
@@ -2816,6 +3819,75 @@
 Success Inertia is what happens when all five rows of the causal table are true simultaneously. It is the total navigation failure. Make this visceral: name organisations that experienced it. The pattern is always the same.</a:t>
             </a:r>
             <a:endParaRPr lang="en-US" dirty="0"/>
+          </a:p>
+          <a:p/>
+          <a:p>
+            <a:r>
+              <a:t>Source detail (S2R® manuscript):</a:t>
+            </a:r>
+          </a:p>
+          <a:p/>
+          <a:p>
+            <a:r>
+              <a:t>Why sustaining performance requires a different discipline from achieving it.</a:t>
+            </a:r>
+          </a:p>
+          <a:p/>
+          <a:p>
+            <a:r>
+              <a:t>The fundamental shift, from finite to infinite: One of the most overlooked realities of organisational performance is that achieving results and sustaining results require entirely different leadership orientations.</a:t>
+            </a:r>
+          </a:p>
+          <a:p>
+            <a:r>
+              <a:t>Achieving performance is a finite game. It has a target, a timeline, and a finish line. The discipline required is intensity: concentrated effort toward a defined outcome within a specific window of time. Leaders are energised by the clarity of the objective. Teams align around the urgency. Resources are focused. Progress is visible. When the target is reached, the game ends and success is declared.</a:t>
+            </a:r>
+          </a:p>
+          <a:p>
+            <a:r>
+              <a:t>Sustaining performance is an infinite game. It has no finish line. There is no moment at which the organisation can declare permanent success and cease the disciplines that produced it. The objective is to remain capable of playing, at an increasingly high level, as the rules, the terrain, and the competition continuously change.</a:t>
+            </a:r>
+          </a:p>
+          <a:p>
+            <a:r>
+              <a:t>The distinction is operational, with profound practical consequences. Leaders who approach sustaining performance with the orientation of achievers (who treat the quarterly review as a finish line when it is a checkpoint, who relax discipline after strong results, who declare the strategy complete once the targets are met) are applying the correct discipline to the wrong game.</a:t>
+            </a:r>
+          </a:p>
+          <a:p>
+            <a:r>
+              <a:t>The discipline of sustaining performance rewards consistency: the unglamorous, unrewarded, structurally demanding practice of maintaining the standards and rhythms that produce results, because the organisation has decided that this is simply how it operates, whether or not it is under pressure. Intensity is not what this discipline rewards.</a:t>
+            </a:r>
+          </a:p>
+          <a:p/>
+          <a:p>
+            <a:r>
+              <a:t>The recalibrating environment: Organisations do not execute strategy in a static environment. At any given moment, the organisation is performing within a field of interacting forces: customer expectations, competitor behaviour, technology capability, regulatory conditions, supply dynamics, macroeconomic pressures, and internal culture. These forces evolve continuously and independently, yet their movements influence one another in ways that are difficult to predict and impossible to control.</a:t>
+            </a:r>
+          </a:p>
+          <a:p>
+            <a:r>
+              <a:t>The consequence of this is both simple and profound: the definition of good performance is constantly being recalibrated by the environment itself.</a:t>
+            </a:r>
+          </a:p>
+          <a:p>
+            <a:r>
+              <a:t>What delivers strong results today may deliver only average results in six months because the environment has moved, even where the organisation has done nothing wrong. The competitor has raised its capability. The customer has elevated their expectation. The regulatory framework has tightened. The technology that once provided an advantage has become a baseline requirement.</a:t>
+            </a:r>
+          </a:p>
+          <a:p>
+            <a:r>
+              <a:t>Leaders who sustain performance are those who continuously examine whether the organisation remains calibrated to the environment in which it must perform. The environment in which it performed well belongs to the past.</a:t>
+            </a:r>
+          </a:p>
+          <a:p>
+            <a:r>
+              <a:t>This requires a leadership discipline that most high-performing organisations do not develop during the period of achievement, because it is not necessary during that period. Strong results create their own momentum. The market is growing. The strategy is delivering. The team is energised. The organisation appears to be moving well.</a:t>
+            </a:r>
+          </a:p>
+          <a:p>
+            <a:r>
+              <a:t>But the environment is already changing. And the discipline of reading those changes, of adjusting before adjustment becomes urgent, is the precise discipline that separates organisations that sustain performance from those that achieve it once and then spend years trying to recover it.</a:t>
+            </a:r>
           </a:p>
         </p:txBody>
       </p:sp>

--- a/Unit decks/Unit 12 - Sustaining Performance.pptx
+++ b/Unit decks/Unit 12 - Sustaining Performance.pptx
@@ -525,7 +525,7 @@
 Module 4 · Grounding · Unit 12 · The final unit of the S2R® programme
 Unit intent (Facilitator Guide):
 Unit 12 answers the central question in organisational performance: how to sustain results once they are achieved. The central argument is precise — sustained performance is a navigation discipline applied continuously to five force categories that never stop moving.
-The architecture of this unit is causal. Awareness introduces Performance Gravity and KISS. Intelligence shows that the three mechanisms of Performance Gravity are each the direct consequence of a specific force category going unnavigated. Extrapolating gives leaders the WHERE (the Alignment Brigade across leadership domains), the HOW TO READ (ABCV as the navigation diagnostic), and the HOW TO RESPOND (KISS as the navigation action). Integration embeds this as a collective quarterly rhythm. Application practises the full chain in real leadership domains.
+The architecture of this unit is causal. Awareness introduces Performance Gravity and KISS. Intelligence shows that the three mechanisms of Performance Gravity are each the direct consequence of a specific force category going unnavigated. Extrapolating gives leaders the WHERE (the collective intelligence for execution discipline across leadership domains), the HOW TO READ (ABCV as the navigation diagnostic), and the HOW TO RESPOND (KISS as the navigation action). Integration embeds this as a collective quarterly rhythm. Application practises the full chain in real leadership domains.
 This unit is industry-neutral and programme-independent. The forces it describes exist in every organisation in every sector every day. The navigation disciplines apply whether or not an organisation has engaged in any formal programme.
 Unit overview (facilitator file): Sustained performance is the continuous navigation of five forces that never stop moving. This unit gives leaders the causal understanding and the navigation architecture to sustain performance — across industries, in daily execution, permanently.</a:t>
             </a:r>
@@ -814,14 +814,14 @@
             <a:r>
               <a:rPr lang="en-US" dirty="0"/>
               <a:t>SECTION 3 · EXTRAPOLATING — WHERE
-The Alignment Brigade — ABCV — KISS Navigation Chain
+The Collective Intelligence for Execution Discipline — ABCV — KISS Navigation Chain
 Where force movements appear first across the enterprise, how to read what they mean for strategic position, and how to determine the navigation response.
 Section learning outcomes:
 1. Locate where force movements appear first across the enterprise.
 2. Determine what each movement means for strategic position and the response it requires.
 FACILITATOR GUIDANCE — Extrapolating
-This section runs in three connected parts. The Alignment Brigade shows WHERE. ABCV shows HOW TO READ IT. KISS shows HOW TO RESPOND. These three are sequentially dependent — do not allow leaders to jump to KISS without completing the ABCV diagnostic. The quality of the KISS response is entirely dependent on the quality of the ABCV reading.
-On the Alignment Brigade: Each row now shows the primary force category alongside the domain. Ask each leader to read their own row and identify which early warning signal is already present. If none are present, ask: “How confident are you that you would see the signal if it appeared?”
+This section runs in three connected parts. The collective intelligence for execution discipline shows WHERE. ABCV shows HOW TO READ IT. KISS shows HOW TO RESPOND. These three are sequentially dependent — do not allow leaders to jump to KISS without completing the ABCV diagnostic. The quality of the KISS response is entirely dependent on the quality of the ABCV reading.
+On the collective intelligence for execution discipline: Each row now shows the primary force category alongside the domain. Ask each leader to read their own row and identify which early warning signal is already present. If none are present, ask: “How confident are you that you would see the signal if it appeared?”
 On ABCV: Participants encountered this in Unit 4 as the OKR stress-test. Make the elevation explicit: “In Unit 4, ABCV tested whether your strategic commitments were soundly built. Here it tests whether they still hold as forces move. Same instrument, elevated purpose.” For each ABCV card, ask leaders to apply the navigation question to the most significant force movement currently active in their environment.
 On the Navigation Chain: The chain is the practical payoff of the entire unit. Walk through it once as a group using a real example from the room before the Application exercise.</a:t>
             </a:r>
@@ -846,7 +846,7 @@
           </a:p>
           <a:p>
             <a:r>
-              <a:t>The executive team therefore operates as an Alignment Brigade: each CXO acting as the guardian of a specific execution stabiliser within their domain, monitoring for the early signals of Performance Gravity and applying the KISS discipline to restore and sustain performance before drift becomes deterioration.</a:t>
+              <a:t>The executive team therefore operates as the collective intelligence for execution discipline: each CXO acting as the guardian of a specific execution stabiliser within their domain, monitoring for the early signals of Performance Gravity and applying the KISS discipline to restore and sustain performance before drift becomes deterioration.</a:t>
             </a:r>
           </a:p>
         </p:txBody>
@@ -933,9 +933,9 @@
           <a:p>
             <a:r>
               <a:rPr lang="en-US" dirty="0"/>
-              <a:t>3.1 — PART 1 · THE ALIGNMENT BRIGADE (WHERE forces pull hardest · 10 leadership domains)
+              <a:t>3.1 — PART 1 · THE COLLECTIVE INTELLIGENCE FOR EXECUTION DISCIPLINE (WHERE forces pull hardest · 10 leadership domains)
 Content:
-Force movements surface first in specific leadership domains — where the organisation’s interface with that force is closest. The Alignment Brigade maps each domain to its primary force category, its characteristic drift pattern, its early warning signals, and the ABCV navigation questions most relevant to that domain.
+Force movements surface first in specific leadership domains — where the organisation’s interface with that force is closest. The collective intelligence for execution discipline maps each domain to its primary force category, its characteristic drift pattern, its early warning signals, and the ABCV navigation questions most relevant to that domain.
 CEO
 Strategic Coherence
 Competitive + Disruptive
@@ -1026,7 +1026,7 @@
 Teams struggling to connect operational priorities to strategic direction. OKRs drifting from strategic objectives. Execution conversations operationally busy but strategically vague. The enterprise operating from last year’s strategic map.
 ABCV Navigation Questions
 Full ABCV diagnostic: A (Arena shifted?), B (Boundaries tightened?), C (Competition reshaped?), V (Value Proposition eroding?) — all four questions apply when force movements accumulate across the enterprise.
-Participant file (3.1 — Part 1 · The Alignment Brigade) — prompts participants complete:
+Participant file (3.1 — Part 1 · The Collective Intelligence for Execution Discipline) — prompts participants complete:
 - ✎ Your domain ABCV question Early warning signal present Force producing it ABCV question it challenges</a:t>
             </a:r>
             <a:endParaRPr lang="en-US" dirty="0"/>
@@ -1239,7 +1239,7 @@
               <a:rPr lang="en-US" dirty="0"/>
               <a:t>3.2 — PART 2 · ABCV AS THE NAVIGATION DIAGNOSTIC (HOW TO READ what force movement means for strategic position)
 Content:
-When the Alignment Brigade detects force movement in any domain, the ABCV framework provides the diagnostic instrument that reveals what that movement means for the organisation’s strategic position. Introduced in this programme as the OKR integrity stress-test, ABCV reaches its full strategic purpose here: four diagnostic questions applied to any detected force movement, each with a Must-Be-True condition that identifies the precise moment a navigation response is required.
+When the leadership team, acting as the collective intelligence for execution discipline, detects force movement in any domain, the ABCV framework provides the diagnostic instrument that reveals what that movement means for the organisation’s strategic position. Introduced in this programme as the OKR integrity stress-test, ABCV reaches its full strategic purpose here: four diagnostic questions applied to any detected force movement, each with a Must-Be-True condition that identifies the precise moment a navigation response is required.
 For each force movement detected: run the four ABCV navigation questions. When a MBT condition can no longer be confirmed as true — that is the navigation signal. That is when KISS is activated.
 Arena
 The Customer End-Game
@@ -1403,7 +1403,7 @@
 The navigation chain closes the loop from force detection to leadership response. It is the operational logic that leaders carry into every quarterly review, every performance conversation, every strategic decision.
 1
 Detect the Force Movement
-The Alignment Brigade identifies where force movements are appearing first. Which domain? Which primary force? Which early warning signal has appeared?
+The leadership team, acting as the collective intelligence for execution discipline, identifies where force movements are appearing first. Which domain? Which primary force? Which early warning signal has appeared?
 ↓
 2
 Run the ABCV Diagnostic
@@ -2604,7 +2604,7 @@
 Intelligence — Why
 Each of the five force categories produces a specific consequence when unnavigated: Competitive + Disruptive → Momentum Illusion; Macro-environmental → Complexity Creep; Social + Environmental → Legitimacy Erosion; Internal → Execution Regression. All five unnavigated simultaneously → Success Inertia. This is causal.
 Extrapolating — Where
-The Alignment Brigade surfaces force movements across ten leadership domains. ABCV provides the diagnostic: which MBT condition has the force movement invalidated? The Navigation Chain closes the loop: Force detected → ABCV reveals invalidated assumption → KISS determines the response.
+The leadership team, acting as the collective intelligence for execution discipline, surfaces force movements across ten leadership domains. ABCV provides the diagnostic: which MBT condition has the force movement invalidated? The Navigation Chain closes the loop: Force detected → ABCV reveals invalidated assumption → KISS determines the response.
 Integration — Collective
 The S2R® Collective Intelligence Review — four instruments, quarterly cadence — is the mechanism through which the enterprise develops collective navigation intelligence. No individual leader can read all five forces. The Review is the collective capability that makes sustained navigation possible.
 Application — In Practice
@@ -2651,7 +2651,7 @@
           </a:p>
           <a:p>
             <a:r>
-              <a:t>Extrapolating (Where): Performance drift emerges simultaneously across the executive stabilisers managed by each CXO role: strategic coherence, capital discipline, operational rhythm, organisational health, technology enablement, market intelligence, revenue conversion, supply resilience, risk intelligence, and strategy translation. The executive team therefore operates as an Alignment Brigade: each leader monitoring the gravitational pull specific to their domain, reading the early warning signals that indicate drift is emerging, and applying the KISS discipline to restore sustained performance before drift becomes deterioration.</a:t>
+              <a:t>Extrapolating (Where): Performance drift emerges simultaneously across the executive stabilisers managed by each CXO role: strategic coherence, capital discipline, operational rhythm, organisational health, technology enablement, market intelligence, revenue conversion, supply resilience, risk intelligence, and strategy translation. The executive team therefore operates as the collective intelligence for execution discipline: each leader monitoring the gravitational pull specific to their domain, reading the early warning signals that indicate drift is emerging, and applying the KISS discipline to restore sustained performance before drift becomes deterioration.</a:t>
             </a:r>
           </a:p>
           <a:p>
@@ -4662,6 +4662,10 @@
             <a:prstDash val="solid"/>
           </a:ln>
         </p:spPr>
+        <p:txBody>
+          <a:bodyPr/>
+          <a:p/>
+        </p:txBody>
       </p:sp>
       <p:pic>
         <p:nvPicPr>
@@ -4986,7 +4990,7 @@
                 <a:ea typeface="Calibri" pitchFamily="34" charset="-122"/>
                 <a:cs typeface="Calibri" pitchFamily="34" charset="-120"/>
               </a:rPr>
-              <a:t>The Alignment Brigade — ABCV — KISS Navigation Chain</a:t>
+              <a:t>The Collective Intelligence for Execution Discipline — ABCV — KISS Navigation Chain</a:t>
             </a:r>
             <a:endParaRPr lang="en-US" sz="2600" dirty="0"/>
           </a:p>
@@ -5055,6 +5059,10 @@
             <a:prstDash val="solid"/>
           </a:ln>
         </p:spPr>
+        <p:txBody>
+          <a:bodyPr/>
+          <a:p/>
+        </p:txBody>
       </p:sp>
       <p:pic>
         <p:nvPicPr>
@@ -5143,6 +5151,10 @@
             <a:prstDash val="solid"/>
           </a:ln>
         </p:spPr>
+        <p:txBody>
+          <a:bodyPr/>
+          <a:p/>
+        </p:txBody>
       </p:sp>
       <p:pic>
         <p:nvPicPr>
@@ -5272,7 +5284,7 @@
                 <a:ea typeface="Cambria" pitchFamily="34" charset="-122"/>
                 <a:cs typeface="Cambria" pitchFamily="34" charset="-120"/>
               </a:rPr>
-              <a:t>3.1 · The Alignment Brigade: ten domains</a:t>
+              <a:t>3.1 · The Collective Intelligence for Execution Discipline: ten domains</a:t>
             </a:r>
             <a:endParaRPr lang="en-US" sz="3600" dirty="0"/>
           </a:p>
@@ -5304,6 +5316,10 @@
             <a:prstDash val="solid"/>
           </a:ln>
         </p:spPr>
+        <p:txBody>
+          <a:bodyPr/>
+          <a:p/>
+        </p:txBody>
       </p:sp>
       <p:sp>
         <p:nvSpPr>
@@ -5384,6 +5400,10 @@
             <a:prstDash val="solid"/>
           </a:ln>
         </p:spPr>
+        <p:txBody>
+          <a:bodyPr/>
+          <a:p/>
+        </p:txBody>
       </p:sp>
       <p:sp>
         <p:nvSpPr>
@@ -5464,6 +5484,10 @@
             <a:prstDash val="solid"/>
           </a:ln>
         </p:spPr>
+        <p:txBody>
+          <a:bodyPr/>
+          <a:p/>
+        </p:txBody>
       </p:sp>
       <p:sp>
         <p:nvSpPr>
@@ -5544,6 +5568,10 @@
             <a:prstDash val="solid"/>
           </a:ln>
         </p:spPr>
+        <p:txBody>
+          <a:bodyPr/>
+          <a:p/>
+        </p:txBody>
       </p:sp>
       <p:sp>
         <p:nvSpPr>
@@ -5624,6 +5652,10 @@
             <a:prstDash val="solid"/>
           </a:ln>
         </p:spPr>
+        <p:txBody>
+          <a:bodyPr/>
+          <a:p/>
+        </p:txBody>
       </p:sp>
       <p:sp>
         <p:nvSpPr>
@@ -5704,6 +5736,10 @@
             <a:prstDash val="solid"/>
           </a:ln>
         </p:spPr>
+        <p:txBody>
+          <a:bodyPr/>
+          <a:p/>
+        </p:txBody>
       </p:sp>
       <p:sp>
         <p:nvSpPr>
@@ -5784,6 +5820,10 @@
             <a:prstDash val="solid"/>
           </a:ln>
         </p:spPr>
+        <p:txBody>
+          <a:bodyPr/>
+          <a:p/>
+        </p:txBody>
       </p:sp>
       <p:sp>
         <p:nvSpPr>
@@ -5864,6 +5904,10 @@
             <a:prstDash val="solid"/>
           </a:ln>
         </p:spPr>
+        <p:txBody>
+          <a:bodyPr/>
+          <a:p/>
+        </p:txBody>
       </p:sp>
       <p:sp>
         <p:nvSpPr>
@@ -5944,6 +5988,10 @@
             <a:prstDash val="solid"/>
           </a:ln>
         </p:spPr>
+        <p:txBody>
+          <a:bodyPr/>
+          <a:p/>
+        </p:txBody>
       </p:sp>
       <p:sp>
         <p:nvSpPr>
@@ -6024,6 +6072,10 @@
             <a:prstDash val="solid"/>
           </a:ln>
         </p:spPr>
+        <p:txBody>
+          <a:bodyPr/>
+          <a:p/>
+        </p:txBody>
       </p:sp>
       <p:sp>
         <p:nvSpPr>
@@ -6175,6 +6227,10 @@
             <a:prstDash val="solid"/>
           </a:ln>
         </p:spPr>
+        <p:txBody>
+          <a:bodyPr/>
+          <a:p/>
+        </p:txBody>
       </p:sp>
       <p:sp>
         <p:nvSpPr>
@@ -6200,6 +6256,10 @@
             <a:prstDash val="solid"/>
           </a:ln>
         </p:spPr>
+        <p:txBody>
+          <a:bodyPr/>
+          <a:p/>
+        </p:txBody>
       </p:sp>
       <p:pic>
         <p:nvPicPr>
@@ -6329,6 +6389,10 @@
             <a:prstDash val="solid"/>
           </a:ln>
         </p:spPr>
+        <p:txBody>
+          <a:bodyPr/>
+          <a:p/>
+        </p:txBody>
       </p:sp>
       <p:sp>
         <p:nvSpPr>
@@ -6354,6 +6418,10 @@
             <a:prstDash val="solid"/>
           </a:ln>
         </p:spPr>
+        <p:txBody>
+          <a:bodyPr/>
+          <a:p/>
+        </p:txBody>
       </p:sp>
       <p:pic>
         <p:nvPicPr>
@@ -6483,6 +6551,10 @@
             <a:prstDash val="solid"/>
           </a:ln>
         </p:spPr>
+        <p:txBody>
+          <a:bodyPr/>
+          <a:p/>
+        </p:txBody>
       </p:sp>
       <p:sp>
         <p:nvSpPr>
@@ -6508,6 +6580,10 @@
             <a:prstDash val="solid"/>
           </a:ln>
         </p:spPr>
+        <p:txBody>
+          <a:bodyPr/>
+          <a:p/>
+        </p:txBody>
       </p:sp>
       <p:pic>
         <p:nvPicPr>
@@ -6637,6 +6713,10 @@
             <a:prstDash val="solid"/>
           </a:ln>
         </p:spPr>
+        <p:txBody>
+          <a:bodyPr/>
+          <a:p/>
+        </p:txBody>
       </p:sp>
       <p:sp>
         <p:nvSpPr>
@@ -6662,6 +6742,10 @@
             <a:prstDash val="solid"/>
           </a:ln>
         </p:spPr>
+        <p:txBody>
+          <a:bodyPr/>
+          <a:p/>
+        </p:txBody>
       </p:sp>
       <p:pic>
         <p:nvPicPr>
@@ -6860,6 +6944,10 @@
             <a:prstDash val="solid"/>
           </a:ln>
         </p:spPr>
+        <p:txBody>
+          <a:bodyPr/>
+          <a:p/>
+        </p:txBody>
       </p:sp>
       <p:pic>
         <p:nvPicPr>
@@ -6962,6 +7050,10 @@
             <a:prstDash val="solid"/>
           </a:ln>
         </p:spPr>
+        <p:txBody>
+          <a:bodyPr/>
+          <a:p/>
+        </p:txBody>
       </p:sp>
       <p:pic>
         <p:nvPicPr>
@@ -7064,6 +7156,10 @@
             <a:prstDash val="solid"/>
           </a:ln>
         </p:spPr>
+        <p:txBody>
+          <a:bodyPr/>
+          <a:p/>
+        </p:txBody>
       </p:sp>
       <p:pic>
         <p:nvPicPr>
@@ -7166,6 +7262,10 @@
             <a:prstDash val="solid"/>
           </a:ln>
         </p:spPr>
+        <p:txBody>
+          <a:bodyPr/>
+          <a:p/>
+        </p:txBody>
       </p:sp>
       <p:pic>
         <p:nvPicPr>
@@ -7495,6 +7595,10 @@
             <a:prstDash val="solid"/>
           </a:ln>
         </p:spPr>
+        <p:txBody>
+          <a:bodyPr/>
+          <a:p/>
+        </p:txBody>
       </p:sp>
       <p:pic>
         <p:nvPicPr>
@@ -7583,6 +7687,10 @@
             <a:prstDash val="solid"/>
           </a:ln>
         </p:spPr>
+        <p:txBody>
+          <a:bodyPr/>
+          <a:p/>
+        </p:txBody>
       </p:sp>
       <p:pic>
         <p:nvPicPr>
@@ -7744,6 +7852,10 @@
             <a:prstDash val="solid"/>
           </a:ln>
         </p:spPr>
+        <p:txBody>
+          <a:bodyPr/>
+          <a:p/>
+        </p:txBody>
       </p:sp>
       <p:sp>
         <p:nvSpPr>
@@ -7769,6 +7881,10 @@
             <a:prstDash val="solid"/>
           </a:ln>
         </p:spPr>
+        <p:txBody>
+          <a:bodyPr/>
+          <a:p/>
+        </p:txBody>
       </p:sp>
       <p:pic>
         <p:nvPicPr>
@@ -7898,6 +8014,10 @@
             <a:prstDash val="solid"/>
           </a:ln>
         </p:spPr>
+        <p:txBody>
+          <a:bodyPr/>
+          <a:p/>
+        </p:txBody>
       </p:sp>
       <p:sp>
         <p:nvSpPr>
@@ -7923,6 +8043,10 @@
             <a:prstDash val="solid"/>
           </a:ln>
         </p:spPr>
+        <p:txBody>
+          <a:bodyPr/>
+          <a:p/>
+        </p:txBody>
       </p:sp>
       <p:pic>
         <p:nvPicPr>
@@ -8052,6 +8176,10 @@
             <a:prstDash val="solid"/>
           </a:ln>
         </p:spPr>
+        <p:txBody>
+          <a:bodyPr/>
+          <a:p/>
+        </p:txBody>
       </p:sp>
       <p:sp>
         <p:nvSpPr>
@@ -8077,6 +8205,10 @@
             <a:prstDash val="solid"/>
           </a:ln>
         </p:spPr>
+        <p:txBody>
+          <a:bodyPr/>
+          <a:p/>
+        </p:txBody>
       </p:sp>
       <p:pic>
         <p:nvPicPr>
@@ -8206,6 +8338,10 @@
             <a:prstDash val="solid"/>
           </a:ln>
         </p:spPr>
+        <p:txBody>
+          <a:bodyPr/>
+          <a:p/>
+        </p:txBody>
       </p:sp>
       <p:sp>
         <p:nvSpPr>
@@ -8231,6 +8367,10 @@
             <a:prstDash val="solid"/>
           </a:ln>
         </p:spPr>
+        <p:txBody>
+          <a:bodyPr/>
+          <a:p/>
+        </p:txBody>
       </p:sp>
       <p:pic>
         <p:nvPicPr>
@@ -8360,6 +8500,10 @@
             <a:prstDash val="solid"/>
           </a:ln>
         </p:spPr>
+        <p:txBody>
+          <a:bodyPr/>
+          <a:p/>
+        </p:txBody>
       </p:sp>
       <p:sp>
         <p:nvSpPr>
@@ -8651,6 +8795,10 @@
             <a:prstDash val="solid"/>
           </a:ln>
         </p:spPr>
+        <p:txBody>
+          <a:bodyPr/>
+          <a:p/>
+        </p:txBody>
       </p:sp>
       <p:pic>
         <p:nvPicPr>
@@ -8739,6 +8887,10 @@
             <a:prstDash val="solid"/>
           </a:ln>
         </p:spPr>
+        <p:txBody>
+          <a:bodyPr/>
+          <a:p/>
+        </p:txBody>
       </p:sp>
       <p:pic>
         <p:nvPicPr>
@@ -8900,6 +9052,10 @@
             <a:prstDash val="solid"/>
           </a:ln>
         </p:spPr>
+        <p:txBody>
+          <a:bodyPr/>
+          <a:p/>
+        </p:txBody>
       </p:sp>
       <p:sp>
         <p:nvSpPr>
@@ -8925,6 +9081,10 @@
             <a:prstDash val="solid"/>
           </a:ln>
         </p:spPr>
+        <p:txBody>
+          <a:bodyPr/>
+          <a:p/>
+        </p:txBody>
       </p:sp>
       <p:pic>
         <p:nvPicPr>
@@ -9054,6 +9214,10 @@
             <a:prstDash val="solid"/>
           </a:ln>
         </p:spPr>
+        <p:txBody>
+          <a:bodyPr/>
+          <a:p/>
+        </p:txBody>
       </p:sp>
       <p:sp>
         <p:nvSpPr>
@@ -9079,6 +9243,10 @@
             <a:prstDash val="solid"/>
           </a:ln>
         </p:spPr>
+        <p:txBody>
+          <a:bodyPr/>
+          <a:p/>
+        </p:txBody>
       </p:sp>
       <p:pic>
         <p:nvPicPr>
@@ -9208,6 +9376,10 @@
             <a:prstDash val="solid"/>
           </a:ln>
         </p:spPr>
+        <p:txBody>
+          <a:bodyPr/>
+          <a:p/>
+        </p:txBody>
       </p:sp>
       <p:sp>
         <p:nvSpPr>
@@ -9233,6 +9405,10 @@
             <a:prstDash val="solid"/>
           </a:ln>
         </p:spPr>
+        <p:txBody>
+          <a:bodyPr/>
+          <a:p/>
+        </p:txBody>
       </p:sp>
       <p:pic>
         <p:nvPicPr>
@@ -9362,6 +9538,10 @@
             <a:prstDash val="solid"/>
           </a:ln>
         </p:spPr>
+        <p:txBody>
+          <a:bodyPr/>
+          <a:p/>
+        </p:txBody>
       </p:sp>
       <p:sp>
         <p:nvSpPr>
@@ -9387,6 +9567,10 @@
             <a:prstDash val="solid"/>
           </a:ln>
         </p:spPr>
+        <p:txBody>
+          <a:bodyPr/>
+          <a:p/>
+        </p:txBody>
       </p:sp>
       <p:pic>
         <p:nvPicPr>
@@ -9585,6 +9769,10 @@
             <a:prstDash val="solid"/>
           </a:ln>
         </p:spPr>
+        <p:txBody>
+          <a:bodyPr/>
+          <a:p/>
+        </p:txBody>
       </p:sp>
       <p:pic>
         <p:nvPicPr>
@@ -9687,6 +9875,10 @@
             <a:prstDash val="solid"/>
           </a:ln>
         </p:spPr>
+        <p:txBody>
+          <a:bodyPr/>
+          <a:p/>
+        </p:txBody>
       </p:sp>
       <p:pic>
         <p:nvPicPr>
@@ -9789,6 +9981,10 @@
             <a:prstDash val="solid"/>
           </a:ln>
         </p:spPr>
+        <p:txBody>
+          <a:bodyPr/>
+          <a:p/>
+        </p:txBody>
       </p:sp>
       <p:pic>
         <p:nvPicPr>
@@ -9962,6 +10158,10 @@
             <a:prstDash val="solid"/>
           </a:ln>
         </p:spPr>
+        <p:txBody>
+          <a:bodyPr/>
+          <a:p/>
+        </p:txBody>
       </p:sp>
       <p:pic>
         <p:nvPicPr>
@@ -10050,6 +10250,10 @@
             <a:prstDash val="solid"/>
           </a:ln>
         </p:spPr>
+        <p:txBody>
+          <a:bodyPr/>
+          <a:p/>
+        </p:txBody>
       </p:sp>
       <p:pic>
         <p:nvPicPr>
@@ -10138,6 +10342,10 @@
             <a:prstDash val="solid"/>
           </a:ln>
         </p:spPr>
+        <p:txBody>
+          <a:bodyPr/>
+          <a:p/>
+        </p:txBody>
       </p:sp>
       <p:pic>
         <p:nvPicPr>
@@ -10226,6 +10434,10 @@
             <a:prstDash val="solid"/>
           </a:ln>
         </p:spPr>
+        <p:txBody>
+          <a:bodyPr/>
+          <a:p/>
+        </p:txBody>
       </p:sp>
       <p:pic>
         <p:nvPicPr>
@@ -10346,6 +10558,10 @@
             <a:prstDash val="solid"/>
           </a:ln>
         </p:spPr>
+        <p:txBody>
+          <a:bodyPr/>
+          <a:p/>
+        </p:txBody>
       </p:sp>
       <p:pic>
         <p:nvPicPr>
@@ -10583,6 +10799,10 @@
             <a:prstDash val="solid"/>
           </a:ln>
         </p:spPr>
+        <p:txBody>
+          <a:bodyPr/>
+          <a:p/>
+        </p:txBody>
       </p:sp>
       <p:pic>
         <p:nvPicPr>
@@ -10685,6 +10905,10 @@
             <a:prstDash val="solid"/>
           </a:ln>
         </p:spPr>
+        <p:txBody>
+          <a:bodyPr/>
+          <a:p/>
+        </p:txBody>
       </p:sp>
       <p:pic>
         <p:nvPicPr>
@@ -10787,6 +11011,10 @@
             <a:prstDash val="solid"/>
           </a:ln>
         </p:spPr>
+        <p:txBody>
+          <a:bodyPr/>
+          <a:p/>
+        </p:txBody>
       </p:sp>
       <p:pic>
         <p:nvPicPr>
@@ -10889,6 +11117,10 @@
             <a:prstDash val="solid"/>
           </a:ln>
         </p:spPr>
+        <p:txBody>
+          <a:bodyPr/>
+          <a:p/>
+        </p:txBody>
       </p:sp>
       <p:pic>
         <p:nvPicPr>
@@ -10991,6 +11223,10 @@
             <a:prstDash val="solid"/>
           </a:ln>
         </p:spPr>
+        <p:txBody>
+          <a:bodyPr/>
+          <a:p/>
+        </p:txBody>
       </p:sp>
       <p:pic>
         <p:nvPicPr>
@@ -11320,6 +11556,10 @@
             <a:prstDash val="solid"/>
           </a:ln>
         </p:spPr>
+        <p:txBody>
+          <a:bodyPr/>
+          <a:p/>
+        </p:txBody>
       </p:sp>
       <p:pic>
         <p:nvPicPr>
@@ -11408,6 +11648,10 @@
             <a:prstDash val="solid"/>
           </a:ln>
         </p:spPr>
+        <p:txBody>
+          <a:bodyPr/>
+          <a:p/>
+        </p:txBody>
       </p:sp>
       <p:pic>
         <p:nvPicPr>
@@ -11528,6 +11772,10 @@
             <a:prstDash val="solid"/>
           </a:ln>
         </p:spPr>
+        <p:txBody>
+          <a:bodyPr/>
+          <a:p/>
+        </p:txBody>
       </p:sp>
       <p:pic>
         <p:nvPicPr>
@@ -11767,6 +12015,10 @@
             <a:prstDash val="solid"/>
           </a:ln>
         </p:spPr>
+        <p:txBody>
+          <a:bodyPr/>
+          <a:p/>
+        </p:txBody>
       </p:sp>
       <p:sp>
         <p:nvSpPr>
@@ -11792,6 +12044,10 @@
             <a:prstDash val="solid"/>
           </a:ln>
         </p:spPr>
+        <p:txBody>
+          <a:bodyPr/>
+          <a:p/>
+        </p:txBody>
       </p:sp>
       <p:pic>
         <p:nvPicPr>
@@ -11921,6 +12177,10 @@
             <a:prstDash val="solid"/>
           </a:ln>
         </p:spPr>
+        <p:txBody>
+          <a:bodyPr/>
+          <a:p/>
+        </p:txBody>
       </p:sp>
       <p:sp>
         <p:nvSpPr>
@@ -11946,6 +12206,10 @@
             <a:prstDash val="solid"/>
           </a:ln>
         </p:spPr>
+        <p:txBody>
+          <a:bodyPr/>
+          <a:p/>
+        </p:txBody>
       </p:sp>
       <p:pic>
         <p:nvPicPr>
@@ -12075,6 +12339,10 @@
             <a:prstDash val="solid"/>
           </a:ln>
         </p:spPr>
+        <p:txBody>
+          <a:bodyPr/>
+          <a:p/>
+        </p:txBody>
       </p:sp>
       <p:sp>
         <p:nvSpPr>
@@ -12100,6 +12368,10 @@
             <a:prstDash val="solid"/>
           </a:ln>
         </p:spPr>
+        <p:txBody>
+          <a:bodyPr/>
+          <a:p/>
+        </p:txBody>
       </p:sp>
       <p:pic>
         <p:nvPicPr>
@@ -12229,6 +12501,10 @@
             <a:prstDash val="solid"/>
           </a:ln>
         </p:spPr>
+        <p:txBody>
+          <a:bodyPr/>
+          <a:p/>
+        </p:txBody>
       </p:sp>
       <p:sp>
         <p:nvSpPr>
@@ -12364,6 +12640,10 @@
             <a:prstDash val="solid"/>
           </a:ln>
         </p:spPr>
+        <p:txBody>
+          <a:bodyPr/>
+          <a:p/>
+        </p:txBody>
       </p:sp>
       <p:pic>
         <p:nvPicPr>
@@ -12466,6 +12746,10 @@
             <a:prstDash val="solid"/>
           </a:ln>
         </p:spPr>
+        <p:txBody>
+          <a:bodyPr/>
+          <a:p/>
+        </p:txBody>
       </p:sp>
       <p:pic>
         <p:nvPicPr>
@@ -12568,6 +12852,10 @@
             <a:prstDash val="solid"/>
           </a:ln>
         </p:spPr>
+        <p:txBody>
+          <a:bodyPr/>
+          <a:p/>
+        </p:txBody>
       </p:sp>
       <p:pic>
         <p:nvPicPr>
@@ -12670,6 +12958,10 @@
             <a:prstDash val="solid"/>
           </a:ln>
         </p:spPr>
+        <p:txBody>
+          <a:bodyPr/>
+          <a:p/>
+        </p:txBody>
       </p:sp>
       <p:pic>
         <p:nvPicPr>
@@ -12999,6 +13291,10 @@
             <a:prstDash val="solid"/>
           </a:ln>
         </p:spPr>
+        <p:txBody>
+          <a:bodyPr/>
+          <a:p/>
+        </p:txBody>
       </p:sp>
       <p:pic>
         <p:nvPicPr>
@@ -13087,6 +13383,10 @@
             <a:prstDash val="solid"/>
           </a:ln>
         </p:spPr>
+        <p:txBody>
+          <a:bodyPr/>
+          <a:p/>
+        </p:txBody>
       </p:sp>
       <p:pic>
         <p:nvPicPr>
@@ -13246,6 +13546,10 @@
             <a:prstDash val="solid"/>
           </a:ln>
         </p:spPr>
+        <p:txBody>
+          <a:bodyPr/>
+          <a:p/>
+        </p:txBody>
       </p:sp>
       <p:pic>
         <p:nvPicPr>
@@ -13348,6 +13652,10 @@
             <a:prstDash val="solid"/>
           </a:ln>
         </p:spPr>
+        <p:txBody>
+          <a:bodyPr/>
+          <a:p/>
+        </p:txBody>
       </p:sp>
       <p:pic>
         <p:nvPicPr>
@@ -13450,6 +13758,10 @@
             <a:prstDash val="solid"/>
           </a:ln>
         </p:spPr>
+        <p:txBody>
+          <a:bodyPr/>
+          <a:p/>
+        </p:txBody>
       </p:sp>
       <p:pic>
         <p:nvPicPr>
@@ -13552,6 +13864,10 @@
             <a:prstDash val="solid"/>
           </a:ln>
         </p:spPr>
+        <p:txBody>
+          <a:bodyPr/>
+          <a:p/>
+        </p:txBody>
       </p:sp>
       <p:pic>
         <p:nvPicPr>
@@ -13654,6 +13970,10 @@
             <a:prstDash val="solid"/>
           </a:ln>
         </p:spPr>
+        <p:txBody>
+          <a:bodyPr/>
+          <a:p/>
+        </p:txBody>
       </p:sp>
       <p:pic>
         <p:nvPicPr>

--- a/Unit decks/Unit 12 - Sustaining Performance.pptx
+++ b/Unit decks/Unit 12 - Sustaining Performance.pptx
@@ -3810,7 +3810,7 @@
 Why the Five Forces Produce Performance Gravity When Unnavigated
 The causal relationship between force movement and organisational performance decline — across industries, in daily execution, permanently.
 Section learning outcomes:
-1. Explain how unnavigated internal and external forces erode strategic coherence.
+1. Counter the internal and external forces that erode strategic coherence.
 2. Diagnose which force is most active in their organisation.
 FACILITATOR GUIDANCE — Intelligence
 This section establishes the causal architecture that makes this unit distinctive. The argument is that performance is hard to sustain because forces are always moving — and the specific way each force moves produces a specific and predictable consequence when not navigated.
@@ -13353,7 +13353,7 @@
                 <a:ea typeface="Calibri" pitchFamily="34" charset="-122"/>
                 <a:cs typeface="Calibri" pitchFamily="34" charset="-120"/>
               </a:rPr>
-              <a:t>Explain how unnavigated internal and external forces erode strategic coherence.</a:t>
+              <a:t>Counter the internal and external forces that erode strategic coherence.</a:t>
             </a:r>
             <a:endParaRPr lang="en-US" sz="2400" dirty="0"/>
           </a:p>

--- a/Unit decks/Unit 12 - Sustaining Performance.pptx
+++ b/Unit decks/Unit 12 - Sustaining Performance.pptx
@@ -4579,6 +4579,11 @@
           <a:p>
             <a:r>
               <a:t>Remind each group that every member agrees the record before it goes to the Capstone S2R® Blueprint.</a:t>
+            </a:r>
+          </a:p>
+          <a:p>
+            <a:r>
+              <a:t>Close the group work with Our Position. Say: "When your record is complete, write as a group a short summary statement of your team's position from this unit, in the unit's own terms. Every member agrees it with the rest of the record. It closes this unit's section of your Capstone S2R Blueprint and guides the assessors through your work."</a:t>
             </a:r>
           </a:p>
         </p:txBody>
